--- a/public/fun/pack/pptx/birthday/돌잔치_17_돌잡이중심_해바라기담장.pptx
+++ b/public/fun/pack/pptx/birthday/돌잔치_17_돌잡이중심_해바라기담장.pptx
@@ -3347,7 +3347,7 @@
             <a:r>
               <a:rPr sz="4000" b="1" i="0">
                 <a:solidFill>
-                  <a:srgbClr val="6E570C"/>
+                  <a:srgbClr val="115F25"/>
                 </a:solidFill>
               </a:rPr>
               <a:t>첫 번째 생일</a:t>
@@ -3385,7 +3385,7 @@
             <a:r>
               <a:rPr sz="1700" b="0" i="1">
                 <a:solidFill>
-                  <a:srgbClr val="6E570C"/>
+                  <a:srgbClr val="115F25"/>
                 </a:solidFill>
               </a:rPr>
               <a:t>무엇을 집어도 박수 쳐 주기로 했습니다</a:t>
@@ -3460,7 +3460,7 @@
     <p:bg>
       <p:bgPr>
         <a:solidFill>
-          <a:srgbClr val="CAA016"/>
+          <a:srgbClr val="26C54E"/>
         </a:solidFill>
         <a:effectLst/>
       </p:bgPr>
@@ -3533,7 +3533,7 @@
             <a:r>
               <a:rPr sz="3000" b="1" i="0">
                 <a:solidFill>
-                  <a:srgbClr val="6E570C"/>
+                  <a:srgbClr val="115F25"/>
                 </a:solidFill>
               </a:rPr>
               <a:t>우리 아기를 소개합니다</a:t>
@@ -3558,11 +3558,11 @@
             </a:avLst>
           </a:prstGeom>
           <a:solidFill>
-            <a:srgbClr val="FAEEC6"/>
+            <a:srgbClr val="D1FADC"/>
           </a:solidFill>
           <a:ln w="19050">
             <a:solidFill>
-              <a:srgbClr val="CAA016"/>
+              <a:srgbClr val="26C54E"/>
             </a:solidFill>
             <a:prstDash val="dash"/>
           </a:ln>
@@ -3581,7 +3581,7 @@
             <a:r>
               <a:rPr sz="1400" b="0" i="0">
                 <a:solidFill>
-                  <a:srgbClr val="6E570C"/>
+                  <a:srgbClr val="115F25"/>
                 </a:solidFill>
               </a:rPr>
               <a:t>아기 사진을 넣어 주세요</a:t>
@@ -3621,7 +3621,7 @@
                       <a:r>
                         <a:rPr sz="1500" b="1">
                           <a:solidFill>
-                            <a:srgbClr val="6E570C"/>
+                            <a:srgbClr val="115F25"/>
                           </a:solidFill>
                         </a:rPr>
                         <a:t>이름</a:t>
@@ -3631,30 +3631,30 @@
                   <a:tcPr anchor="ctr" marL="73152" marR="73152">
                     <a:lnL w="9525" cap="flat" cmpd="sng" algn="ctr">
                       <a:solidFill>
-                        <a:srgbClr val="FAEEC6"/>
+                        <a:srgbClr val="D1FADC"/>
                       </a:solidFill>
                       <a:prstDash val="solid"/>
                     </a:lnL>
                     <a:lnR w="9525" cap="flat" cmpd="sng" algn="ctr">
                       <a:solidFill>
-                        <a:srgbClr val="FAEEC6"/>
+                        <a:srgbClr val="D1FADC"/>
                       </a:solidFill>
                       <a:prstDash val="solid"/>
                     </a:lnR>
                     <a:lnT w="9525" cap="flat" cmpd="sng" algn="ctr">
                       <a:solidFill>
-                        <a:srgbClr val="FAEEC6"/>
+                        <a:srgbClr val="D1FADC"/>
                       </a:solidFill>
                       <a:prstDash val="solid"/>
                     </a:lnT>
                     <a:lnB w="9525" cap="flat" cmpd="sng" algn="ctr">
                       <a:solidFill>
-                        <a:srgbClr val="FAEEC6"/>
+                        <a:srgbClr val="D1FADC"/>
                       </a:solidFill>
                       <a:prstDash val="solid"/>
                     </a:lnB>
                     <a:solidFill>
-                      <a:srgbClr val="FAEEC6"/>
+                      <a:srgbClr val="D1FADC"/>
                     </a:solidFill>
                   </a:tcPr>
                 </a:tc>
@@ -3677,30 +3677,30 @@
                   <a:tcPr anchor="ctr" marL="73152" marR="73152">
                     <a:lnL w="9525" cap="flat" cmpd="sng" algn="ctr">
                       <a:solidFill>
-                        <a:srgbClr val="FAEEC6"/>
+                        <a:srgbClr val="D1FADC"/>
                       </a:solidFill>
                       <a:prstDash val="solid"/>
                     </a:lnL>
                     <a:lnR w="9525" cap="flat" cmpd="sng" algn="ctr">
                       <a:solidFill>
-                        <a:srgbClr val="FAEEC6"/>
+                        <a:srgbClr val="D1FADC"/>
                       </a:solidFill>
                       <a:prstDash val="solid"/>
                     </a:lnR>
                     <a:lnT w="9525" cap="flat" cmpd="sng" algn="ctr">
                       <a:solidFill>
-                        <a:srgbClr val="FAEEC6"/>
+                        <a:srgbClr val="D1FADC"/>
                       </a:solidFill>
                       <a:prstDash val="solid"/>
                     </a:lnT>
                     <a:lnB w="9525" cap="flat" cmpd="sng" algn="ctr">
                       <a:solidFill>
-                        <a:srgbClr val="FAEEC6"/>
+                        <a:srgbClr val="D1FADC"/>
                       </a:solidFill>
                       <a:prstDash val="solid"/>
                     </a:lnB>
                     <a:solidFill>
-                      <a:srgbClr val="FDF9ED"/>
+                      <a:srgbClr val="EEFCF1"/>
                     </a:solidFill>
                   </a:tcPr>
                 </a:tc>
@@ -3715,7 +3715,7 @@
                       <a:r>
                         <a:rPr sz="1500" b="1">
                           <a:solidFill>
-                            <a:srgbClr val="6E570C"/>
+                            <a:srgbClr val="115F25"/>
                           </a:solidFill>
                         </a:rPr>
                         <a:t>생일</a:t>
@@ -3725,30 +3725,30 @@
                   <a:tcPr anchor="ctr" marL="73152" marR="73152">
                     <a:lnL w="9525" cap="flat" cmpd="sng" algn="ctr">
                       <a:solidFill>
-                        <a:srgbClr val="FAEEC6"/>
+                        <a:srgbClr val="D1FADC"/>
                       </a:solidFill>
                       <a:prstDash val="solid"/>
                     </a:lnL>
                     <a:lnR w="9525" cap="flat" cmpd="sng" algn="ctr">
                       <a:solidFill>
-                        <a:srgbClr val="FAEEC6"/>
+                        <a:srgbClr val="D1FADC"/>
                       </a:solidFill>
                       <a:prstDash val="solid"/>
                     </a:lnR>
                     <a:lnT w="9525" cap="flat" cmpd="sng" algn="ctr">
                       <a:solidFill>
-                        <a:srgbClr val="FAEEC6"/>
+                        <a:srgbClr val="D1FADC"/>
                       </a:solidFill>
                       <a:prstDash val="solid"/>
                     </a:lnT>
                     <a:lnB w="9525" cap="flat" cmpd="sng" algn="ctr">
                       <a:solidFill>
-                        <a:srgbClr val="FAEEC6"/>
+                        <a:srgbClr val="D1FADC"/>
                       </a:solidFill>
                       <a:prstDash val="solid"/>
                     </a:lnB>
                     <a:solidFill>
-                      <a:srgbClr val="FAEEC6"/>
+                      <a:srgbClr val="D1FADC"/>
                     </a:solidFill>
                   </a:tcPr>
                 </a:tc>
@@ -3771,25 +3771,25 @@
                   <a:tcPr anchor="ctr" marL="73152" marR="73152">
                     <a:lnL w="9525" cap="flat" cmpd="sng" algn="ctr">
                       <a:solidFill>
-                        <a:srgbClr val="FAEEC6"/>
+                        <a:srgbClr val="D1FADC"/>
                       </a:solidFill>
                       <a:prstDash val="solid"/>
                     </a:lnL>
                     <a:lnR w="9525" cap="flat" cmpd="sng" algn="ctr">
                       <a:solidFill>
-                        <a:srgbClr val="FAEEC6"/>
+                        <a:srgbClr val="D1FADC"/>
                       </a:solidFill>
                       <a:prstDash val="solid"/>
                     </a:lnR>
                     <a:lnT w="9525" cap="flat" cmpd="sng" algn="ctr">
                       <a:solidFill>
-                        <a:srgbClr val="FAEEC6"/>
+                        <a:srgbClr val="D1FADC"/>
                       </a:solidFill>
                       <a:prstDash val="solid"/>
                     </a:lnT>
                     <a:lnB w="9525" cap="flat" cmpd="sng" algn="ctr">
                       <a:solidFill>
-                        <a:srgbClr val="FAEEC6"/>
+                        <a:srgbClr val="D1FADC"/>
                       </a:solidFill>
                       <a:prstDash val="solid"/>
                     </a:lnB>
@@ -3809,7 +3809,7 @@
                       <a:r>
                         <a:rPr sz="1500" b="1">
                           <a:solidFill>
-                            <a:srgbClr val="6E570C"/>
+                            <a:srgbClr val="115F25"/>
                           </a:solidFill>
                         </a:rPr>
                         <a:t>키 · 몸무게</a:t>
@@ -3819,30 +3819,30 @@
                   <a:tcPr anchor="ctr" marL="73152" marR="73152">
                     <a:lnL w="9525" cap="flat" cmpd="sng" algn="ctr">
                       <a:solidFill>
-                        <a:srgbClr val="FAEEC6"/>
+                        <a:srgbClr val="D1FADC"/>
                       </a:solidFill>
                       <a:prstDash val="solid"/>
                     </a:lnL>
                     <a:lnR w="9525" cap="flat" cmpd="sng" algn="ctr">
                       <a:solidFill>
-                        <a:srgbClr val="FAEEC6"/>
+                        <a:srgbClr val="D1FADC"/>
                       </a:solidFill>
                       <a:prstDash val="solid"/>
                     </a:lnR>
                     <a:lnT w="9525" cap="flat" cmpd="sng" algn="ctr">
                       <a:solidFill>
-                        <a:srgbClr val="FAEEC6"/>
+                        <a:srgbClr val="D1FADC"/>
                       </a:solidFill>
                       <a:prstDash val="solid"/>
                     </a:lnT>
                     <a:lnB w="9525" cap="flat" cmpd="sng" algn="ctr">
                       <a:solidFill>
-                        <a:srgbClr val="FAEEC6"/>
+                        <a:srgbClr val="D1FADC"/>
                       </a:solidFill>
                       <a:prstDash val="solid"/>
                     </a:lnB>
                     <a:solidFill>
-                      <a:srgbClr val="FAEEC6"/>
+                      <a:srgbClr val="D1FADC"/>
                     </a:solidFill>
                   </a:tcPr>
                 </a:tc>
@@ -3865,30 +3865,30 @@
                   <a:tcPr anchor="ctr" marL="73152" marR="73152">
                     <a:lnL w="9525" cap="flat" cmpd="sng" algn="ctr">
                       <a:solidFill>
-                        <a:srgbClr val="FAEEC6"/>
+                        <a:srgbClr val="D1FADC"/>
                       </a:solidFill>
                       <a:prstDash val="solid"/>
                     </a:lnL>
                     <a:lnR w="9525" cap="flat" cmpd="sng" algn="ctr">
                       <a:solidFill>
-                        <a:srgbClr val="FAEEC6"/>
+                        <a:srgbClr val="D1FADC"/>
                       </a:solidFill>
                       <a:prstDash val="solid"/>
                     </a:lnR>
                     <a:lnT w="9525" cap="flat" cmpd="sng" algn="ctr">
                       <a:solidFill>
-                        <a:srgbClr val="FAEEC6"/>
+                        <a:srgbClr val="D1FADC"/>
                       </a:solidFill>
                       <a:prstDash val="solid"/>
                     </a:lnT>
                     <a:lnB w="9525" cap="flat" cmpd="sng" algn="ctr">
                       <a:solidFill>
-                        <a:srgbClr val="FAEEC6"/>
+                        <a:srgbClr val="D1FADC"/>
                       </a:solidFill>
                       <a:prstDash val="solid"/>
                     </a:lnB>
                     <a:solidFill>
-                      <a:srgbClr val="FDF9ED"/>
+                      <a:srgbClr val="EEFCF1"/>
                     </a:solidFill>
                   </a:tcPr>
                 </a:tc>
@@ -3903,7 +3903,7 @@
                       <a:r>
                         <a:rPr sz="1500" b="1">
                           <a:solidFill>
-                            <a:srgbClr val="6E570C"/>
+                            <a:srgbClr val="115F25"/>
                           </a:solidFill>
                         </a:rPr>
                         <a:t>좋아하는 것</a:t>
@@ -3913,30 +3913,30 @@
                   <a:tcPr anchor="ctr" marL="73152" marR="73152">
                     <a:lnL w="9525" cap="flat" cmpd="sng" algn="ctr">
                       <a:solidFill>
-                        <a:srgbClr val="FAEEC6"/>
+                        <a:srgbClr val="D1FADC"/>
                       </a:solidFill>
                       <a:prstDash val="solid"/>
                     </a:lnL>
                     <a:lnR w="9525" cap="flat" cmpd="sng" algn="ctr">
                       <a:solidFill>
-                        <a:srgbClr val="FAEEC6"/>
+                        <a:srgbClr val="D1FADC"/>
                       </a:solidFill>
                       <a:prstDash val="solid"/>
                     </a:lnR>
                     <a:lnT w="9525" cap="flat" cmpd="sng" algn="ctr">
                       <a:solidFill>
-                        <a:srgbClr val="FAEEC6"/>
+                        <a:srgbClr val="D1FADC"/>
                       </a:solidFill>
                       <a:prstDash val="solid"/>
                     </a:lnT>
                     <a:lnB w="9525" cap="flat" cmpd="sng" algn="ctr">
                       <a:solidFill>
-                        <a:srgbClr val="FAEEC6"/>
+                        <a:srgbClr val="D1FADC"/>
                       </a:solidFill>
                       <a:prstDash val="solid"/>
                     </a:lnB>
                     <a:solidFill>
-                      <a:srgbClr val="FAEEC6"/>
+                      <a:srgbClr val="D1FADC"/>
                     </a:solidFill>
                   </a:tcPr>
                 </a:tc>
@@ -3959,25 +3959,25 @@
                   <a:tcPr anchor="ctr" marL="73152" marR="73152">
                     <a:lnL w="9525" cap="flat" cmpd="sng" algn="ctr">
                       <a:solidFill>
-                        <a:srgbClr val="FAEEC6"/>
+                        <a:srgbClr val="D1FADC"/>
                       </a:solidFill>
                       <a:prstDash val="solid"/>
                     </a:lnL>
                     <a:lnR w="9525" cap="flat" cmpd="sng" algn="ctr">
                       <a:solidFill>
-                        <a:srgbClr val="FAEEC6"/>
+                        <a:srgbClr val="D1FADC"/>
                       </a:solidFill>
                       <a:prstDash val="solid"/>
                     </a:lnR>
                     <a:lnT w="9525" cap="flat" cmpd="sng" algn="ctr">
                       <a:solidFill>
-                        <a:srgbClr val="FAEEC6"/>
+                        <a:srgbClr val="D1FADC"/>
                       </a:solidFill>
                       <a:prstDash val="solid"/>
                     </a:lnT>
                     <a:lnB w="9525" cap="flat" cmpd="sng" algn="ctr">
                       <a:solidFill>
-                        <a:srgbClr val="FAEEC6"/>
+                        <a:srgbClr val="D1FADC"/>
                       </a:solidFill>
                       <a:prstDash val="solid"/>
                     </a:lnB>
@@ -3997,7 +3997,7 @@
                       <a:r>
                         <a:rPr sz="1500" b="1">
                           <a:solidFill>
-                            <a:srgbClr val="6E570C"/>
+                            <a:srgbClr val="115F25"/>
                           </a:solidFill>
                         </a:rPr>
                         <a:t>별명</a:t>
@@ -4007,30 +4007,30 @@
                   <a:tcPr anchor="ctr" marL="73152" marR="73152">
                     <a:lnL w="9525" cap="flat" cmpd="sng" algn="ctr">
                       <a:solidFill>
-                        <a:srgbClr val="FAEEC6"/>
+                        <a:srgbClr val="D1FADC"/>
                       </a:solidFill>
                       <a:prstDash val="solid"/>
                     </a:lnL>
                     <a:lnR w="9525" cap="flat" cmpd="sng" algn="ctr">
                       <a:solidFill>
-                        <a:srgbClr val="FAEEC6"/>
+                        <a:srgbClr val="D1FADC"/>
                       </a:solidFill>
                       <a:prstDash val="solid"/>
                     </a:lnR>
                     <a:lnT w="9525" cap="flat" cmpd="sng" algn="ctr">
                       <a:solidFill>
-                        <a:srgbClr val="FAEEC6"/>
+                        <a:srgbClr val="D1FADC"/>
                       </a:solidFill>
                       <a:prstDash val="solid"/>
                     </a:lnT>
                     <a:lnB w="9525" cap="flat" cmpd="sng" algn="ctr">
                       <a:solidFill>
-                        <a:srgbClr val="FAEEC6"/>
+                        <a:srgbClr val="D1FADC"/>
                       </a:solidFill>
                       <a:prstDash val="solid"/>
                     </a:lnB>
                     <a:solidFill>
-                      <a:srgbClr val="FAEEC6"/>
+                      <a:srgbClr val="D1FADC"/>
                     </a:solidFill>
                   </a:tcPr>
                 </a:tc>
@@ -4053,30 +4053,30 @@
                   <a:tcPr anchor="ctr" marL="73152" marR="73152">
                     <a:lnL w="9525" cap="flat" cmpd="sng" algn="ctr">
                       <a:solidFill>
-                        <a:srgbClr val="FAEEC6"/>
+                        <a:srgbClr val="D1FADC"/>
                       </a:solidFill>
                       <a:prstDash val="solid"/>
                     </a:lnL>
                     <a:lnR w="9525" cap="flat" cmpd="sng" algn="ctr">
                       <a:solidFill>
-                        <a:srgbClr val="FAEEC6"/>
+                        <a:srgbClr val="D1FADC"/>
                       </a:solidFill>
                       <a:prstDash val="solid"/>
                     </a:lnR>
                     <a:lnT w="9525" cap="flat" cmpd="sng" algn="ctr">
                       <a:solidFill>
-                        <a:srgbClr val="FAEEC6"/>
+                        <a:srgbClr val="D1FADC"/>
                       </a:solidFill>
                       <a:prstDash val="solid"/>
                     </a:lnT>
                     <a:lnB w="9525" cap="flat" cmpd="sng" algn="ctr">
                       <a:solidFill>
-                        <a:srgbClr val="FAEEC6"/>
+                        <a:srgbClr val="D1FADC"/>
                       </a:solidFill>
                       <a:prstDash val="solid"/>
                     </a:lnB>
                     <a:solidFill>
-                      <a:srgbClr val="FDF9ED"/>
+                      <a:srgbClr val="EEFCF1"/>
                     </a:solidFill>
                   </a:tcPr>
                 </a:tc>
@@ -4091,7 +4091,7 @@
                       <a:r>
                         <a:rPr sz="1500" b="1">
                           <a:solidFill>
-                            <a:srgbClr val="6E570C"/>
+                            <a:srgbClr val="115F25"/>
                           </a:solidFill>
                         </a:rPr>
                         <a:t>부모의 마음</a:t>
@@ -4101,30 +4101,30 @@
                   <a:tcPr anchor="ctr" marL="73152" marR="73152">
                     <a:lnL w="9525" cap="flat" cmpd="sng" algn="ctr">
                       <a:solidFill>
-                        <a:srgbClr val="FAEEC6"/>
+                        <a:srgbClr val="D1FADC"/>
                       </a:solidFill>
                       <a:prstDash val="solid"/>
                     </a:lnL>
                     <a:lnR w="9525" cap="flat" cmpd="sng" algn="ctr">
                       <a:solidFill>
-                        <a:srgbClr val="FAEEC6"/>
+                        <a:srgbClr val="D1FADC"/>
                       </a:solidFill>
                       <a:prstDash val="solid"/>
                     </a:lnR>
                     <a:lnT w="9525" cap="flat" cmpd="sng" algn="ctr">
                       <a:solidFill>
-                        <a:srgbClr val="FAEEC6"/>
+                        <a:srgbClr val="D1FADC"/>
                       </a:solidFill>
                       <a:prstDash val="solid"/>
                     </a:lnT>
                     <a:lnB w="9525" cap="flat" cmpd="sng" algn="ctr">
                       <a:solidFill>
-                        <a:srgbClr val="FAEEC6"/>
+                        <a:srgbClr val="D1FADC"/>
                       </a:solidFill>
                       <a:prstDash val="solid"/>
                     </a:lnB>
                     <a:solidFill>
-                      <a:srgbClr val="FAEEC6"/>
+                      <a:srgbClr val="D1FADC"/>
                     </a:solidFill>
                   </a:tcPr>
                 </a:tc>
@@ -4147,25 +4147,25 @@
                   <a:tcPr anchor="ctr" marL="73152" marR="73152">
                     <a:lnL w="9525" cap="flat" cmpd="sng" algn="ctr">
                       <a:solidFill>
-                        <a:srgbClr val="FAEEC6"/>
+                        <a:srgbClr val="D1FADC"/>
                       </a:solidFill>
                       <a:prstDash val="solid"/>
                     </a:lnL>
                     <a:lnR w="9525" cap="flat" cmpd="sng" algn="ctr">
                       <a:solidFill>
-                        <a:srgbClr val="FAEEC6"/>
+                        <a:srgbClr val="D1FADC"/>
                       </a:solidFill>
                       <a:prstDash val="solid"/>
                     </a:lnR>
                     <a:lnT w="9525" cap="flat" cmpd="sng" algn="ctr">
                       <a:solidFill>
-                        <a:srgbClr val="FAEEC6"/>
+                        <a:srgbClr val="D1FADC"/>
                       </a:solidFill>
                       <a:prstDash val="solid"/>
                     </a:lnT>
                     <a:lnB w="9525" cap="flat" cmpd="sng" algn="ctr">
                       <a:solidFill>
-                        <a:srgbClr val="FAEEC6"/>
+                        <a:srgbClr val="D1FADC"/>
                       </a:solidFill>
                       <a:prstDash val="solid"/>
                     </a:lnB>
@@ -4193,7 +4193,7 @@
     <p:bg>
       <p:bgPr>
         <a:solidFill>
-          <a:srgbClr val="CAA016"/>
+          <a:srgbClr val="26C54E"/>
         </a:solidFill>
         <a:effectLst/>
       </p:bgPr>
@@ -4266,7 +4266,7 @@
             <a:r>
               <a:rPr sz="3000" b="1" i="0">
                 <a:solidFill>
-                  <a:srgbClr val="6E570C"/>
+                  <a:srgbClr val="115F25"/>
                 </a:solidFill>
               </a:rPr>
               <a:t>돌잡이 이야기</a:t>
@@ -4291,11 +4291,11 @@
             </a:avLst>
           </a:prstGeom>
           <a:solidFill>
-            <a:srgbClr val="FDF9ED"/>
+            <a:srgbClr val="EEFCF1"/>
           </a:solidFill>
           <a:ln w="15875">
             <a:solidFill>
-              <a:srgbClr val="FAEEC6"/>
+              <a:srgbClr val="D1FADC"/>
             </a:solidFill>
           </a:ln>
         </p:spPr>
@@ -4322,7 +4322,7 @@
             <a:avLst/>
           </a:prstGeom>
           <a:solidFill>
-            <a:srgbClr val="CAA016"/>
+            <a:srgbClr val="26C54E"/>
           </a:solidFill>
           <a:ln>
             <a:noFill/>
@@ -4380,7 +4380,7 @@
             <a:r>
               <a:rPr sz="1600" b="1" i="0">
                 <a:solidFill>
-                  <a:srgbClr val="6E570C"/>
+                  <a:srgbClr val="115F25"/>
                 </a:solidFill>
               </a:rPr>
               <a:t>연필 · 공부</a:t>
@@ -4443,11 +4443,11 @@
             </a:avLst>
           </a:prstGeom>
           <a:solidFill>
-            <a:srgbClr val="FDF9ED"/>
+            <a:srgbClr val="EEFCF1"/>
           </a:solidFill>
           <a:ln w="15875">
             <a:solidFill>
-              <a:srgbClr val="FAEEC6"/>
+              <a:srgbClr val="D1FADC"/>
             </a:solidFill>
           </a:ln>
         </p:spPr>
@@ -4474,7 +4474,7 @@
             <a:avLst/>
           </a:prstGeom>
           <a:solidFill>
-            <a:srgbClr val="CAA016"/>
+            <a:srgbClr val="26C54E"/>
           </a:solidFill>
           <a:ln>
             <a:noFill/>
@@ -4532,7 +4532,7 @@
             <a:r>
               <a:rPr sz="1600" b="1" i="0">
                 <a:solidFill>
-                  <a:srgbClr val="6E570C"/>
+                  <a:srgbClr val="115F25"/>
                 </a:solidFill>
               </a:rPr>
               <a:t>실 · 장수</a:t>
@@ -4595,11 +4595,11 @@
             </a:avLst>
           </a:prstGeom>
           <a:solidFill>
-            <a:srgbClr val="FDF9ED"/>
+            <a:srgbClr val="EEFCF1"/>
           </a:solidFill>
           <a:ln w="15875">
             <a:solidFill>
-              <a:srgbClr val="FAEEC6"/>
+              <a:srgbClr val="D1FADC"/>
             </a:solidFill>
           </a:ln>
         </p:spPr>
@@ -4626,7 +4626,7 @@
             <a:avLst/>
           </a:prstGeom>
           <a:solidFill>
-            <a:srgbClr val="CAA016"/>
+            <a:srgbClr val="26C54E"/>
           </a:solidFill>
           <a:ln>
             <a:noFill/>
@@ -4684,7 +4684,7 @@
             <a:r>
               <a:rPr sz="1600" b="1" i="0">
                 <a:solidFill>
-                  <a:srgbClr val="6E570C"/>
+                  <a:srgbClr val="115F25"/>
                 </a:solidFill>
               </a:rPr>
               <a:t>돈 · 부</a:t>
@@ -4747,11 +4747,11 @@
             </a:avLst>
           </a:prstGeom>
           <a:solidFill>
-            <a:srgbClr val="FDF9ED"/>
+            <a:srgbClr val="EEFCF1"/>
           </a:solidFill>
           <a:ln w="15875">
             <a:solidFill>
-              <a:srgbClr val="FAEEC6"/>
+              <a:srgbClr val="D1FADC"/>
             </a:solidFill>
           </a:ln>
         </p:spPr>
@@ -4778,7 +4778,7 @@
             <a:avLst/>
           </a:prstGeom>
           <a:solidFill>
-            <a:srgbClr val="CAA016"/>
+            <a:srgbClr val="26C54E"/>
           </a:solidFill>
           <a:ln>
             <a:noFill/>
@@ -4836,7 +4836,7 @@
             <a:r>
               <a:rPr sz="1600" b="1" i="0">
                 <a:solidFill>
-                  <a:srgbClr val="6E570C"/>
+                  <a:srgbClr val="115F25"/>
                 </a:solidFill>
               </a:rPr>
               <a:t>마이크 · 인기</a:t>
@@ -4896,7 +4896,7 @@
     <p:bg>
       <p:bgPr>
         <a:solidFill>
-          <a:srgbClr val="CAA016"/>
+          <a:srgbClr val="26C54E"/>
         </a:solidFill>
         <a:effectLst/>
       </p:bgPr>
@@ -4969,7 +4969,7 @@
             <a:r>
               <a:rPr sz="3000" b="1" i="0">
                 <a:solidFill>
-                  <a:srgbClr val="6E570C"/>
+                  <a:srgbClr val="115F25"/>
                 </a:solidFill>
               </a:rPr>
               <a:t>우리 아기의 선택은?</a:t>
@@ -4994,11 +4994,11 @@
             </a:avLst>
           </a:prstGeom>
           <a:solidFill>
-            <a:srgbClr val="FAEEC6"/>
+            <a:srgbClr val="D1FADC"/>
           </a:solidFill>
           <a:ln w="19050">
             <a:solidFill>
-              <a:srgbClr val="CAA016"/>
+              <a:srgbClr val="26C54E"/>
             </a:solidFill>
             <a:prstDash val="dash"/>
           </a:ln>
@@ -5017,7 +5017,7 @@
             <a:r>
               <a:rPr sz="1400" b="0" i="0">
                 <a:solidFill>
-                  <a:srgbClr val="6E570C"/>
+                  <a:srgbClr val="115F25"/>
                 </a:solidFill>
               </a:rPr>
               <a:t>돌잡이 사진</a:t>
@@ -5042,11 +5042,11 @@
             </a:avLst>
           </a:prstGeom>
           <a:solidFill>
-            <a:srgbClr val="FDF9ED"/>
+            <a:srgbClr val="EEFCF1"/>
           </a:solidFill>
           <a:ln w="12700">
             <a:solidFill>
-              <a:srgbClr val="FAEEC6"/>
+              <a:srgbClr val="D1FADC"/>
             </a:solidFill>
           </a:ln>
         </p:spPr>
@@ -5170,7 +5170,7 @@
     <p:bg>
       <p:bgPr>
         <a:solidFill>
-          <a:srgbClr val="CAA016"/>
+          <a:srgbClr val="26C54E"/>
         </a:solidFill>
         <a:effectLst/>
       </p:bgPr>
@@ -5243,7 +5243,7 @@
             <a:r>
               <a:rPr sz="3000" b="1" i="0">
                 <a:solidFill>
-                  <a:srgbClr val="6E570C"/>
+                  <a:srgbClr val="115F25"/>
                 </a:solidFill>
               </a:rPr>
               <a:t>사진 모음</a:t>
@@ -5268,11 +5268,11 @@
             </a:avLst>
           </a:prstGeom>
           <a:solidFill>
-            <a:srgbClr val="FAEEC6"/>
+            <a:srgbClr val="D1FADC"/>
           </a:solidFill>
           <a:ln w="19050">
             <a:solidFill>
-              <a:srgbClr val="CAA016"/>
+              <a:srgbClr val="26C54E"/>
             </a:solidFill>
             <a:prstDash val="dash"/>
           </a:ln>
@@ -5291,7 +5291,7 @@
             <a:r>
               <a:rPr sz="1200" b="0" i="0">
                 <a:solidFill>
-                  <a:srgbClr val="6E570C"/>
+                  <a:srgbClr val="115F25"/>
                 </a:solidFill>
               </a:rPr>
               <a:t>사진 1</a:t>
@@ -5316,11 +5316,11 @@
             </a:avLst>
           </a:prstGeom>
           <a:solidFill>
-            <a:srgbClr val="FAEEC6"/>
+            <a:srgbClr val="D1FADC"/>
           </a:solidFill>
           <a:ln w="19050">
             <a:solidFill>
-              <a:srgbClr val="CAA016"/>
+              <a:srgbClr val="26C54E"/>
             </a:solidFill>
             <a:prstDash val="dash"/>
           </a:ln>
@@ -5339,7 +5339,7 @@
             <a:r>
               <a:rPr sz="1200" b="0" i="0">
                 <a:solidFill>
-                  <a:srgbClr val="6E570C"/>
+                  <a:srgbClr val="115F25"/>
                 </a:solidFill>
               </a:rPr>
               <a:t>사진 2</a:t>
@@ -5364,11 +5364,11 @@
             </a:avLst>
           </a:prstGeom>
           <a:solidFill>
-            <a:srgbClr val="FAEEC6"/>
+            <a:srgbClr val="D1FADC"/>
           </a:solidFill>
           <a:ln w="19050">
             <a:solidFill>
-              <a:srgbClr val="CAA016"/>
+              <a:srgbClr val="26C54E"/>
             </a:solidFill>
             <a:prstDash val="dash"/>
           </a:ln>
@@ -5387,7 +5387,7 @@
             <a:r>
               <a:rPr sz="1200" b="0" i="0">
                 <a:solidFill>
-                  <a:srgbClr val="6E570C"/>
+                  <a:srgbClr val="115F25"/>
                 </a:solidFill>
               </a:rPr>
               <a:t>사진 3</a:t>
@@ -5412,11 +5412,11 @@
             </a:avLst>
           </a:prstGeom>
           <a:solidFill>
-            <a:srgbClr val="FAEEC6"/>
+            <a:srgbClr val="D1FADC"/>
           </a:solidFill>
           <a:ln w="19050">
             <a:solidFill>
-              <a:srgbClr val="CAA016"/>
+              <a:srgbClr val="26C54E"/>
             </a:solidFill>
             <a:prstDash val="dash"/>
           </a:ln>
@@ -5435,7 +5435,7 @@
             <a:r>
               <a:rPr sz="1200" b="0" i="0">
                 <a:solidFill>
-                  <a:srgbClr val="6E570C"/>
+                  <a:srgbClr val="115F25"/>
                 </a:solidFill>
               </a:rPr>
               <a:t>사진 4</a:t>
@@ -5460,11 +5460,11 @@
             </a:avLst>
           </a:prstGeom>
           <a:solidFill>
-            <a:srgbClr val="FAEEC6"/>
+            <a:srgbClr val="D1FADC"/>
           </a:solidFill>
           <a:ln w="19050">
             <a:solidFill>
-              <a:srgbClr val="CAA016"/>
+              <a:srgbClr val="26C54E"/>
             </a:solidFill>
             <a:prstDash val="dash"/>
           </a:ln>
@@ -5483,7 +5483,7 @@
             <a:r>
               <a:rPr sz="1200" b="0" i="0">
                 <a:solidFill>
-                  <a:srgbClr val="6E570C"/>
+                  <a:srgbClr val="115F25"/>
                 </a:solidFill>
               </a:rPr>
               <a:t>사진 5</a:t>
@@ -5508,11 +5508,11 @@
             </a:avLst>
           </a:prstGeom>
           <a:solidFill>
-            <a:srgbClr val="FAEEC6"/>
+            <a:srgbClr val="D1FADC"/>
           </a:solidFill>
           <a:ln w="19050">
             <a:solidFill>
-              <a:srgbClr val="CAA016"/>
+              <a:srgbClr val="26C54E"/>
             </a:solidFill>
             <a:prstDash val="dash"/>
           </a:ln>
@@ -5531,7 +5531,7 @@
             <a:r>
               <a:rPr sz="1200" b="0" i="0">
                 <a:solidFill>
-                  <a:srgbClr val="6E570C"/>
+                  <a:srgbClr val="115F25"/>
                 </a:solidFill>
               </a:rPr>
               <a:t>사진 6</a:t>
@@ -5556,11 +5556,11 @@
             </a:avLst>
           </a:prstGeom>
           <a:solidFill>
-            <a:srgbClr val="FAEEC6"/>
+            <a:srgbClr val="D1FADC"/>
           </a:solidFill>
           <a:ln w="19050">
             <a:solidFill>
-              <a:srgbClr val="CAA016"/>
+              <a:srgbClr val="26C54E"/>
             </a:solidFill>
             <a:prstDash val="dash"/>
           </a:ln>
@@ -5579,7 +5579,7 @@
             <a:r>
               <a:rPr sz="1200" b="0" i="0">
                 <a:solidFill>
-                  <a:srgbClr val="6E570C"/>
+                  <a:srgbClr val="115F25"/>
                 </a:solidFill>
               </a:rPr>
               <a:t>사진 7</a:t>
@@ -5604,11 +5604,11 @@
             </a:avLst>
           </a:prstGeom>
           <a:solidFill>
-            <a:srgbClr val="FAEEC6"/>
+            <a:srgbClr val="D1FADC"/>
           </a:solidFill>
           <a:ln w="19050">
             <a:solidFill>
-              <a:srgbClr val="CAA016"/>
+              <a:srgbClr val="26C54E"/>
             </a:solidFill>
             <a:prstDash val="dash"/>
           </a:ln>
@@ -5627,7 +5627,7 @@
             <a:r>
               <a:rPr sz="1200" b="0" i="0">
                 <a:solidFill>
-                  <a:srgbClr val="6E570C"/>
+                  <a:srgbClr val="115F25"/>
                 </a:solidFill>
               </a:rPr>
               <a:t>사진 8</a:t>
@@ -5707,7 +5707,7 @@
             <a:r>
               <a:rPr sz="3400" b="1" i="0">
                 <a:solidFill>
-                  <a:srgbClr val="6E570C"/>
+                  <a:srgbClr val="115F25"/>
                 </a:solidFill>
               </a:rPr>
               <a:t>와 주셔서 고맙습니다</a:t>
@@ -5745,7 +5745,7 @@
             <a:r>
               <a:rPr sz="1700" b="0" i="1">
                 <a:solidFill>
-                  <a:srgbClr val="6E570C"/>
+                  <a:srgbClr val="115F25"/>
                 </a:solidFill>
               </a:rPr>
               <a:t>아이가 한 살이 되었습니다</a:t>
@@ -5810,34 +5810,34 @@
         <a:sysClr val="window" lastClr="FFFFFF"/>
       </a:lt1>
       <a:dk2>
-        <a:srgbClr val="6E570C"/>
+        <a:srgbClr val="115F25"/>
       </a:dk2>
       <a:lt2>
-        <a:srgbClr val="FDF9ED"/>
+        <a:srgbClr val="EEFCF1"/>
       </a:lt2>
       <a:accent1>
-        <a:srgbClr val="CAA016"/>
+        <a:srgbClr val="26C54E"/>
       </a:accent1>
       <a:accent2>
-        <a:srgbClr val="3B7A91"/>
+        <a:srgbClr val="209DB6"/>
       </a:accent2>
       <a:accent3>
-        <a:srgbClr val="6E570C"/>
+        <a:srgbClr val="115F25"/>
       </a:accent3>
       <a:accent4>
-        <a:srgbClr val="FAEEC6"/>
+        <a:srgbClr val="D1FADC"/>
       </a:accent4>
       <a:accent5>
-        <a:srgbClr val="828D54"/>
+        <a:srgbClr val="23B182"/>
       </a:accent5>
       <a:accent6>
-        <a:srgbClr val="A89A6D"/>
+        <a:srgbClr val="709F7C"/>
       </a:accent6>
       <a:hlink>
-        <a:srgbClr val="CAA016"/>
+        <a:srgbClr val="26C54E"/>
       </a:hlink>
       <a:folHlink>
-        <a:srgbClr val="6E570C"/>
+        <a:srgbClr val="115F25"/>
       </a:folHlink>
     </a:clrScheme>
     <a:fontScheme name="Office">

--- a/public/fun/pack/pptx/birthday/돌잔치_17_돌잡이중심_해바라기담장.pptx
+++ b/public/fun/pack/pptx/birthday/돌잔치_17_돌잡이중심_해바라기담장.pptx
@@ -3286,6 +3286,14 @@
 <file path=ppt/slides/slide1.xml><?xml version="1.0" encoding="utf-8"?>
 <p:sld xmlns:a="http://schemas.openxmlformats.org/drawingml/2006/main" xmlns:p="http://schemas.openxmlformats.org/presentationml/2006/main" xmlns:r="http://schemas.openxmlformats.org/officeDocument/2006/relationships">
   <p:cSld>
+    <p:bg>
+      <p:bgPr>
+        <a:solidFill>
+          <a:srgbClr val="FDF8EA"/>
+        </a:solidFill>
+        <a:effectLst/>
+      </p:bgPr>
+    </p:bg>
     <p:spTree>
       <p:nvGrpSpPr>
         <p:cNvPr id="1" name=""/>
@@ -3293,30 +3301,116 @@
         <p:nvPr/>
       </p:nvGrpSpPr>
       <p:grpSpPr/>
-      <p:pic>
-        <p:nvPicPr>
-          <p:cNvPr id="3" name="표지 그림" descr="birthday-17.jpg"/>
-          <p:cNvPicPr>
-            <a:picLocks noChangeAspect="1"/>
-          </p:cNvPicPr>
+      <p:sp>
+        <p:nvSpPr>
+          <p:cNvPr id="3" name="사진 자리"/>
+          <p:cNvSpPr/>
           <p:nvPr/>
-        </p:nvPicPr>
-        <p:blipFill>
-          <a:blip r:embed="rId2"/>
-          <a:stretch>
-            <a:fillRect/>
-          </a:stretch>
-        </p:blipFill>
+        </p:nvSpPr>
         <p:spPr>
           <a:xfrm>
             <a:off x="0" y="0"/>
-            <a:ext cx="12191695" cy="6858000"/>
+            <a:ext cx="4389010" cy="6858000"/>
           </a:xfrm>
           <a:prstGeom prst="rect">
             <a:avLst/>
           </a:prstGeom>
-        </p:spPr>
-      </p:pic>
+          <a:solidFill>
+            <a:srgbClr val="F3E1A5"/>
+          </a:solidFill>
+          <a:ln>
+            <a:noFill/>
+          </a:ln>
+        </p:spPr>
+        <p:txBody>
+          <a:bodyPr rtlCol="0" anchor="ctr" wrap="square" lIns="54864" rIns="54864" tIns="27432" bIns="27432">
+            <a:noAutofit/>
+          </a:bodyPr>
+          <a:lstStyle/>
+          <a:p>
+            <a:pPr algn="ctr">
+              <a:lnSpc>
+                <a:spcPct val="100000"/>
+              </a:lnSpc>
+            </a:pPr>
+            <a:r>
+              <a:rPr sz="1400" b="0" i="0">
+                <a:solidFill>
+                  <a:srgbClr val="494127"/>
+                </a:solidFill>
+              </a:rPr>
+              <a:t>사진을 넣어 주세요</a:t>
+            </a:r>
+          </a:p>
+        </p:txBody>
+      </p:sp>
+      <p:sp>
+        <p:nvSpPr>
+          <p:cNvPr id="4" name="장식"/>
+          <p:cNvSpPr/>
+          <p:nvPr/>
+        </p:nvSpPr>
+        <p:spPr>
+          <a:xfrm>
+            <a:off x="365750" y="365760"/>
+            <a:ext cx="3657508" cy="6126480"/>
+          </a:xfrm>
+          <a:prstGeom prst="rect">
+            <a:avLst/>
+          </a:prstGeom>
+          <a:noFill/>
+          <a:ln w="9525">
+            <a:solidFill>
+              <a:srgbClr val="26231F"/>
+            </a:solidFill>
+          </a:ln>
+        </p:spPr>
+        <p:txBody>
+          <a:bodyPr rtlCol="0" anchor="ctr"/>
+          <a:lstStyle/>
+          <a:p>
+            <a:pPr algn="ctr"/>
+          </a:p>
+        </p:txBody>
+      </p:sp>
+      <p:sp>
+        <p:nvSpPr>
+          <p:cNvPr id="5" name="라벨"/>
+          <p:cNvSpPr txBox="1"/>
+          <p:nvPr/>
+        </p:nvSpPr>
+        <p:spPr>
+          <a:xfrm>
+            <a:off x="6827349" y="2148840"/>
+            <a:ext cx="4632844" cy="274320"/>
+          </a:xfrm>
+          <a:prstGeom prst="rect">
+            <a:avLst/>
+          </a:prstGeom>
+          <a:noFill/>
+        </p:spPr>
+        <p:txBody>
+          <a:bodyPr wrap="square" lIns="54864" rIns="54864" tIns="27432" bIns="27432" anchor="t">
+            <a:noAutofit/>
+          </a:bodyPr>
+          <a:lstStyle/>
+          <a:p>
+            <a:pPr algn="l">
+              <a:lnSpc>
+                <a:spcPct val="115000"/>
+              </a:lnSpc>
+            </a:pPr>
+            <a:r>
+              <a:rPr sz="1000" b="1" i="0" spc="250">
+                <a:solidFill>
+                  <a:srgbClr val="26231F"/>
+                </a:solidFill>
+              </a:rPr>
+              <a:t>FIRST BIRTHDAY</a:t>
+            </a:r>
+          </a:p>
+        </p:txBody>
+      </p:sp>
       <p:sp>
         <p:nvSpPr>
           <p:cNvPr id="2" name="Title 1"/>
@@ -3329,8 +3423,8 @@
         </p:nvSpPr>
         <p:spPr>
           <a:xfrm>
-            <a:off x="853418" y="2057400"/>
-            <a:ext cx="6095847" cy="1554480"/>
+            <a:off x="6827349" y="2606040"/>
+            <a:ext cx="4632844" cy="1188720"/>
           </a:xfrm>
         </p:spPr>
         <p:txBody>
@@ -3347,7 +3441,7 @@
             <a:r>
               <a:rPr sz="4000" b="1" i="0">
                 <a:solidFill>
-                  <a:srgbClr val="115F25"/>
+                  <a:srgbClr val="26231F"/>
                 </a:solidFill>
               </a:rPr>
               <a:t>첫 번째 생일</a:t>
@@ -3357,14 +3451,14 @@
       </p:sp>
       <p:sp>
         <p:nvSpPr>
-          <p:cNvPr id="4" name="한 줄 문구"/>
+          <p:cNvPr id="6" name="한 줄 문구"/>
           <p:cNvSpPr txBox="1"/>
           <p:nvPr/>
         </p:nvSpPr>
         <p:spPr>
           <a:xfrm>
-            <a:off x="853418" y="3749039"/>
-            <a:ext cx="6095847" cy="822960"/>
+            <a:off x="6827349" y="3886200"/>
+            <a:ext cx="4632844" cy="822960"/>
           </a:xfrm>
           <a:prstGeom prst="rect">
             <a:avLst/>
@@ -3383,9 +3477,9 @@
               </a:lnSpc>
             </a:pPr>
             <a:r>
-              <a:rPr sz="1700" b="0" i="1">
-                <a:solidFill>
-                  <a:srgbClr val="115F25"/>
+              <a:rPr sz="1700" b="0" i="0">
+                <a:solidFill>
+                  <a:srgbClr val="26231F"/>
                 </a:solidFill>
               </a:rPr>
               <a:t>무엇을 집어도 박수 쳐 주기로 했습니다</a:t>
@@ -3395,14 +3489,14 @@
       </p:sp>
       <p:sp>
         <p:nvSpPr>
-          <p:cNvPr id="5" name="안내 문구"/>
+          <p:cNvPr id="7" name="안내 문구"/>
           <p:cNvSpPr txBox="1"/>
           <p:nvPr/>
         </p:nvSpPr>
         <p:spPr>
           <a:xfrm>
-            <a:off x="853418" y="4617720"/>
-            <a:ext cx="6095847" cy="914400"/>
+            <a:off x="6827349" y="4754880"/>
+            <a:ext cx="4632844" cy="914400"/>
           </a:xfrm>
           <a:prstGeom prst="rect">
             <a:avLst/>
@@ -3423,10 +3517,10 @@
             <a:r>
               <a:rPr sz="1400" b="0" i="0">
                 <a:solidFill>
-                  <a:srgbClr val="666666"/>
+                  <a:srgbClr val="26231F"/>
                 </a:solidFill>
               </a:rPr>
-              <a:t>아기 이름 · 2027. 00. 00</a:t>
+              <a:t>아기 이름 · 날짜 입력</a:t>
             </a:r>
           </a:p>
           <a:p>
@@ -3438,7 +3532,7 @@
             <a:r>
               <a:rPr sz="1400" b="0" i="0">
                 <a:solidFill>
-                  <a:srgbClr val="666666"/>
+                  <a:srgbClr val="26231F"/>
                 </a:solidFill>
               </a:rPr>
               <a:t>장소를 입력하세요</a:t>
@@ -3460,7 +3554,7 @@
     <p:bg>
       <p:bgPr>
         <a:solidFill>
-          <a:srgbClr val="26C54E"/>
+          <a:srgbClr val="FFFFFF"/>
         </a:solidFill>
         <a:effectLst/>
       </p:bgPr>
@@ -3474,22 +3568,20 @@
       <p:grpSpPr/>
       <p:sp>
         <p:nvSpPr>
-          <p:cNvPr id="3" name="장식"/>
+          <p:cNvPr id="3" name="포인트"/>
           <p:cNvSpPr/>
           <p:nvPr/>
         </p:nvSpPr>
         <p:spPr>
           <a:xfrm>
-            <a:off x="274320" y="274320"/>
-            <a:ext cx="11643055" cy="6309360"/>
-          </a:xfrm>
-          <a:prstGeom prst="roundRect">
-            <a:avLst>
-              <a:gd name="adj" fmla="val 3500"/>
-            </a:avLst>
+            <a:off x="5958687" y="246888"/>
+            <a:ext cx="274320" cy="274320"/>
+          </a:xfrm>
+          <a:prstGeom prst="round2SameRect">
+            <a:avLst/>
           </a:prstGeom>
           <a:solidFill>
-            <a:srgbClr val="FFFFFF"/>
+            <a:srgbClr val="EAD07B"/>
           </a:solidFill>
           <a:ln>
             <a:noFill/>
@@ -3505,19 +3597,48 @@
       </p:sp>
       <p:sp>
         <p:nvSpPr>
-          <p:cNvPr id="2" name="Title 1"/>
-          <p:cNvSpPr>
-            <a:spLocks noGrp="1"/>
-          </p:cNvSpPr>
-          <p:nvPr>
-            <p:ph type="title"/>
-          </p:nvPr>
-        </p:nvSpPr>
-        <p:spPr>
-          <a:xfrm>
-            <a:off x="731520" y="548640"/>
-            <a:ext cx="9448495" cy="868680"/>
-          </a:xfrm>
+          <p:cNvPr id="4" name="장식"/>
+          <p:cNvSpPr/>
+          <p:nvPr/>
+        </p:nvSpPr>
+        <p:spPr>
+          <a:xfrm>
+            <a:off x="5684367" y="1572768"/>
+            <a:ext cx="822960" cy="22860"/>
+          </a:xfrm>
+          <a:prstGeom prst="rect">
+            <a:avLst/>
+          </a:prstGeom>
+          <a:solidFill>
+            <a:srgbClr val="EAD07B"/>
+          </a:solidFill>
+          <a:ln>
+            <a:noFill/>
+          </a:ln>
+        </p:spPr>
+        <p:txBody>
+          <a:bodyPr rtlCol="0" anchor="ctr"/>
+          <a:lstStyle/>
+          <a:p>
+            <a:pPr algn="ctr"/>
+          </a:p>
+        </p:txBody>
+      </p:sp>
+      <p:sp>
+        <p:nvSpPr>
+          <p:cNvPr id="5" name="상단 라벨"/>
+          <p:cNvSpPr txBox="1"/>
+          <p:nvPr/>
+        </p:nvSpPr>
+        <p:spPr>
+          <a:xfrm>
+            <a:off x="640080" y="182880"/>
+            <a:ext cx="3657600" cy="274320"/>
+          </a:xfrm>
+          <a:prstGeom prst="rect">
+            <a:avLst/>
+          </a:prstGeom>
+          <a:noFill/>
         </p:spPr>
         <p:txBody>
           <a:bodyPr wrap="square" lIns="54864" rIns="54864" tIns="27432" bIns="27432" anchor="ctr">
@@ -3526,6 +3647,44 @@
           <a:lstStyle/>
           <a:p>
             <a:pPr algn="l">
+              <a:lnSpc>
+                <a:spcPct val="115000"/>
+              </a:lnSpc>
+            </a:pPr>
+            <a:r>
+              <a:rPr sz="800" b="1" i="0" spc="250">
+                <a:solidFill>
+                  <a:srgbClr val="8E8780"/>
+                </a:solidFill>
+              </a:rPr>
+              <a:t>FIRST BIRTHDAY</a:t>
+            </a:r>
+          </a:p>
+        </p:txBody>
+      </p:sp>
+      <p:sp>
+        <p:nvSpPr>
+          <p:cNvPr id="2" name="Title 1"/>
+          <p:cNvSpPr>
+            <a:spLocks noGrp="1"/>
+          </p:cNvSpPr>
+          <p:nvPr>
+            <p:ph type="title"/>
+          </p:nvPr>
+        </p:nvSpPr>
+        <p:spPr>
+          <a:xfrm>
+            <a:off x="1371600" y="640080"/>
+            <a:ext cx="9448495" cy="868680"/>
+          </a:xfrm>
+        </p:spPr>
+        <p:txBody>
+          <a:bodyPr wrap="square" lIns="54864" rIns="54864" tIns="27432" bIns="27432" anchor="ctr">
+            <a:noAutofit/>
+          </a:bodyPr>
+          <a:lstStyle/>
+          <a:p>
+            <a:pPr algn="ctr">
               <a:lnSpc>
                 <a:spcPct val="105000"/>
               </a:lnSpc>
@@ -3533,7 +3692,7 @@
             <a:r>
               <a:rPr sz="3000" b="1" i="0">
                 <a:solidFill>
-                  <a:srgbClr val="115F25"/>
+                  <a:srgbClr val="26231F"/>
                 </a:solidFill>
               </a:rPr>
               <a:t>우리 아기를 소개합니다</a:t>
@@ -3543,14 +3702,14 @@
       </p:sp>
       <p:sp>
         <p:nvSpPr>
-          <p:cNvPr id="4" name="사진 자리"/>
+          <p:cNvPr id="6" name="사진 자리"/>
           <p:cNvSpPr/>
           <p:nvPr/>
         </p:nvSpPr>
         <p:spPr>
           <a:xfrm>
-            <a:off x="731520" y="1600200"/>
-            <a:ext cx="3840480" cy="4434840"/>
+            <a:off x="640080" y="1783080"/>
+            <a:ext cx="3840480" cy="4389120"/>
           </a:xfrm>
           <a:prstGeom prst="roundRect">
             <a:avLst>
@@ -3558,12 +3717,10 @@
             </a:avLst>
           </a:prstGeom>
           <a:solidFill>
-            <a:srgbClr val="D1FADC"/>
+            <a:srgbClr val="FAF1D1"/>
           </a:solidFill>
           <a:ln w="19050">
-            <a:solidFill>
-              <a:srgbClr val="26C54E"/>
-            </a:solidFill>
+            <a:noFill/>
             <a:prstDash val="dash"/>
           </a:ln>
         </p:spPr>
@@ -3581,7 +3738,7 @@
             <a:r>
               <a:rPr sz="1400" b="0" i="0">
                 <a:solidFill>
-                  <a:srgbClr val="115F25"/>
+                  <a:srgbClr val="8E8780"/>
                 </a:solidFill>
               </a:rPr>
               <a:t>아기 사진을 넣어 주세요</a:t>
@@ -3591,15 +3748,15 @@
       </p:sp>
       <p:graphicFrame>
         <p:nvGraphicFramePr>
-          <p:cNvPr id="5" name="표"/>
+          <p:cNvPr id="7" name="표"/>
           <p:cNvGraphicFramePr>
             <a:graphicFrameLocks noGrp="1"/>
           </p:cNvGraphicFramePr>
           <p:nvPr/>
         </p:nvGraphicFramePr>
         <p:xfrm>
-          <a:off x="4937759" y="1600200"/>
-          <a:ext cx="6522415" cy="3950208"/>
+          <a:off x="4846320" y="1783080"/>
+          <a:ext cx="6705295" cy="3950208"/>
         </p:xfrm>
         <a:graphic>
           <a:graphicData uri="http://schemas.openxmlformats.org/drawingml/2006/table">
@@ -3609,7 +3766,7 @@
               </a:tblPr>
               <a:tblGrid>
                 <a:gridCol w="1828800"/>
-                <a:gridCol w="4693615"/>
+                <a:gridCol w="4876495"/>
               </a:tblGrid>
               <a:tr h="658368">
                 <a:tc>
@@ -3621,7 +3778,7 @@
                       <a:r>
                         <a:rPr sz="1500" b="1">
                           <a:solidFill>
-                            <a:srgbClr val="115F25"/>
+                            <a:srgbClr val="494127"/>
                           </a:solidFill>
                         </a:rPr>
                         <a:t>이름</a:t>
@@ -3631,30 +3788,30 @@
                   <a:tcPr anchor="ctr" marL="73152" marR="73152">
                     <a:lnL w="9525" cap="flat" cmpd="sng" algn="ctr">
                       <a:solidFill>
-                        <a:srgbClr val="D1FADC"/>
+                        <a:srgbClr val="FAF1D1"/>
                       </a:solidFill>
                       <a:prstDash val="solid"/>
                     </a:lnL>
                     <a:lnR w="9525" cap="flat" cmpd="sng" algn="ctr">
                       <a:solidFill>
-                        <a:srgbClr val="D1FADC"/>
+                        <a:srgbClr val="FAF1D1"/>
                       </a:solidFill>
                       <a:prstDash val="solid"/>
                     </a:lnR>
                     <a:lnT w="9525" cap="flat" cmpd="sng" algn="ctr">
                       <a:solidFill>
-                        <a:srgbClr val="D1FADC"/>
+                        <a:srgbClr val="FAF1D1"/>
                       </a:solidFill>
                       <a:prstDash val="solid"/>
                     </a:lnT>
                     <a:lnB w="9525" cap="flat" cmpd="sng" algn="ctr">
                       <a:solidFill>
-                        <a:srgbClr val="D1FADC"/>
+                        <a:srgbClr val="FAF1D1"/>
                       </a:solidFill>
                       <a:prstDash val="solid"/>
                     </a:lnB>
                     <a:solidFill>
-                      <a:srgbClr val="D1FADC"/>
+                      <a:srgbClr val="FAF1D1"/>
                     </a:solidFill>
                   </a:tcPr>
                 </a:tc>
@@ -3667,7 +3824,7 @@
                       <a:r>
                         <a:rPr sz="1500" b="0">
                           <a:solidFill>
-                            <a:srgbClr val="2B2B2B"/>
+                            <a:srgbClr val="26231F"/>
                           </a:solidFill>
                         </a:rPr>
                         <a:t>입력하세요</a:t>
@@ -3677,30 +3834,30 @@
                   <a:tcPr anchor="ctr" marL="73152" marR="73152">
                     <a:lnL w="9525" cap="flat" cmpd="sng" algn="ctr">
                       <a:solidFill>
-                        <a:srgbClr val="D1FADC"/>
+                        <a:srgbClr val="FAF1D1"/>
                       </a:solidFill>
                       <a:prstDash val="solid"/>
                     </a:lnL>
                     <a:lnR w="9525" cap="flat" cmpd="sng" algn="ctr">
                       <a:solidFill>
-                        <a:srgbClr val="D1FADC"/>
+                        <a:srgbClr val="FAF1D1"/>
                       </a:solidFill>
                       <a:prstDash val="solid"/>
                     </a:lnR>
                     <a:lnT w="9525" cap="flat" cmpd="sng" algn="ctr">
                       <a:solidFill>
-                        <a:srgbClr val="D1FADC"/>
+                        <a:srgbClr val="FAF1D1"/>
                       </a:solidFill>
                       <a:prstDash val="solid"/>
                     </a:lnT>
                     <a:lnB w="9525" cap="flat" cmpd="sng" algn="ctr">
                       <a:solidFill>
-                        <a:srgbClr val="D1FADC"/>
+                        <a:srgbClr val="FAF1D1"/>
                       </a:solidFill>
                       <a:prstDash val="solid"/>
                     </a:lnB>
                     <a:solidFill>
-                      <a:srgbClr val="EEFCF1"/>
+                      <a:srgbClr val="FDF8EA"/>
                     </a:solidFill>
                   </a:tcPr>
                 </a:tc>
@@ -3715,7 +3872,7 @@
                       <a:r>
                         <a:rPr sz="1500" b="1">
                           <a:solidFill>
-                            <a:srgbClr val="115F25"/>
+                            <a:srgbClr val="494127"/>
                           </a:solidFill>
                         </a:rPr>
                         <a:t>생일</a:t>
@@ -3725,30 +3882,30 @@
                   <a:tcPr anchor="ctr" marL="73152" marR="73152">
                     <a:lnL w="9525" cap="flat" cmpd="sng" algn="ctr">
                       <a:solidFill>
-                        <a:srgbClr val="D1FADC"/>
+                        <a:srgbClr val="FAF1D1"/>
                       </a:solidFill>
                       <a:prstDash val="solid"/>
                     </a:lnL>
                     <a:lnR w="9525" cap="flat" cmpd="sng" algn="ctr">
                       <a:solidFill>
-                        <a:srgbClr val="D1FADC"/>
+                        <a:srgbClr val="FAF1D1"/>
                       </a:solidFill>
                       <a:prstDash val="solid"/>
                     </a:lnR>
                     <a:lnT w="9525" cap="flat" cmpd="sng" algn="ctr">
                       <a:solidFill>
-                        <a:srgbClr val="D1FADC"/>
+                        <a:srgbClr val="FAF1D1"/>
                       </a:solidFill>
                       <a:prstDash val="solid"/>
                     </a:lnT>
                     <a:lnB w="9525" cap="flat" cmpd="sng" algn="ctr">
                       <a:solidFill>
-                        <a:srgbClr val="D1FADC"/>
+                        <a:srgbClr val="FAF1D1"/>
                       </a:solidFill>
                       <a:prstDash val="solid"/>
                     </a:lnB>
                     <a:solidFill>
-                      <a:srgbClr val="D1FADC"/>
+                      <a:srgbClr val="FAF1D1"/>
                     </a:solidFill>
                   </a:tcPr>
                 </a:tc>
@@ -3761,7 +3918,7 @@
                       <a:r>
                         <a:rPr sz="1500" b="0">
                           <a:solidFill>
-                            <a:srgbClr val="2B2B2B"/>
+                            <a:srgbClr val="26231F"/>
                           </a:solidFill>
                         </a:rPr>
                         <a:t>입력하세요</a:t>
@@ -3771,25 +3928,25 @@
                   <a:tcPr anchor="ctr" marL="73152" marR="73152">
                     <a:lnL w="9525" cap="flat" cmpd="sng" algn="ctr">
                       <a:solidFill>
-                        <a:srgbClr val="D1FADC"/>
+                        <a:srgbClr val="FAF1D1"/>
                       </a:solidFill>
                       <a:prstDash val="solid"/>
                     </a:lnL>
                     <a:lnR w="9525" cap="flat" cmpd="sng" algn="ctr">
                       <a:solidFill>
-                        <a:srgbClr val="D1FADC"/>
+                        <a:srgbClr val="FAF1D1"/>
                       </a:solidFill>
                       <a:prstDash val="solid"/>
                     </a:lnR>
                     <a:lnT w="9525" cap="flat" cmpd="sng" algn="ctr">
                       <a:solidFill>
-                        <a:srgbClr val="D1FADC"/>
+                        <a:srgbClr val="FAF1D1"/>
                       </a:solidFill>
                       <a:prstDash val="solid"/>
                     </a:lnT>
                     <a:lnB w="9525" cap="flat" cmpd="sng" algn="ctr">
                       <a:solidFill>
-                        <a:srgbClr val="D1FADC"/>
+                        <a:srgbClr val="FAF1D1"/>
                       </a:solidFill>
                       <a:prstDash val="solid"/>
                     </a:lnB>
@@ -3809,7 +3966,7 @@
                       <a:r>
                         <a:rPr sz="1500" b="1">
                           <a:solidFill>
-                            <a:srgbClr val="115F25"/>
+                            <a:srgbClr val="494127"/>
                           </a:solidFill>
                         </a:rPr>
                         <a:t>키 · 몸무게</a:t>
@@ -3819,30 +3976,30 @@
                   <a:tcPr anchor="ctr" marL="73152" marR="73152">
                     <a:lnL w="9525" cap="flat" cmpd="sng" algn="ctr">
                       <a:solidFill>
-                        <a:srgbClr val="D1FADC"/>
+                        <a:srgbClr val="FAF1D1"/>
                       </a:solidFill>
                       <a:prstDash val="solid"/>
                     </a:lnL>
                     <a:lnR w="9525" cap="flat" cmpd="sng" algn="ctr">
                       <a:solidFill>
-                        <a:srgbClr val="D1FADC"/>
+                        <a:srgbClr val="FAF1D1"/>
                       </a:solidFill>
                       <a:prstDash val="solid"/>
                     </a:lnR>
                     <a:lnT w="9525" cap="flat" cmpd="sng" algn="ctr">
                       <a:solidFill>
-                        <a:srgbClr val="D1FADC"/>
+                        <a:srgbClr val="FAF1D1"/>
                       </a:solidFill>
                       <a:prstDash val="solid"/>
                     </a:lnT>
                     <a:lnB w="9525" cap="flat" cmpd="sng" algn="ctr">
                       <a:solidFill>
-                        <a:srgbClr val="D1FADC"/>
+                        <a:srgbClr val="FAF1D1"/>
                       </a:solidFill>
                       <a:prstDash val="solid"/>
                     </a:lnB>
                     <a:solidFill>
-                      <a:srgbClr val="D1FADC"/>
+                      <a:srgbClr val="FAF1D1"/>
                     </a:solidFill>
                   </a:tcPr>
                 </a:tc>
@@ -3855,7 +4012,7 @@
                       <a:r>
                         <a:rPr sz="1500" b="0">
                           <a:solidFill>
-                            <a:srgbClr val="2B2B2B"/>
+                            <a:srgbClr val="26231F"/>
                           </a:solidFill>
                         </a:rPr>
                         <a:t>입력하세요</a:t>
@@ -3865,30 +4022,30 @@
                   <a:tcPr anchor="ctr" marL="73152" marR="73152">
                     <a:lnL w="9525" cap="flat" cmpd="sng" algn="ctr">
                       <a:solidFill>
-                        <a:srgbClr val="D1FADC"/>
+                        <a:srgbClr val="FAF1D1"/>
                       </a:solidFill>
                       <a:prstDash val="solid"/>
                     </a:lnL>
                     <a:lnR w="9525" cap="flat" cmpd="sng" algn="ctr">
                       <a:solidFill>
-                        <a:srgbClr val="D1FADC"/>
+                        <a:srgbClr val="FAF1D1"/>
                       </a:solidFill>
                       <a:prstDash val="solid"/>
                     </a:lnR>
                     <a:lnT w="9525" cap="flat" cmpd="sng" algn="ctr">
                       <a:solidFill>
-                        <a:srgbClr val="D1FADC"/>
+                        <a:srgbClr val="FAF1D1"/>
                       </a:solidFill>
                       <a:prstDash val="solid"/>
                     </a:lnT>
                     <a:lnB w="9525" cap="flat" cmpd="sng" algn="ctr">
                       <a:solidFill>
-                        <a:srgbClr val="D1FADC"/>
+                        <a:srgbClr val="FAF1D1"/>
                       </a:solidFill>
                       <a:prstDash val="solid"/>
                     </a:lnB>
                     <a:solidFill>
-                      <a:srgbClr val="EEFCF1"/>
+                      <a:srgbClr val="FDF8EA"/>
                     </a:solidFill>
                   </a:tcPr>
                 </a:tc>
@@ -3903,7 +4060,7 @@
                       <a:r>
                         <a:rPr sz="1500" b="1">
                           <a:solidFill>
-                            <a:srgbClr val="115F25"/>
+                            <a:srgbClr val="494127"/>
                           </a:solidFill>
                         </a:rPr>
                         <a:t>좋아하는 것</a:t>
@@ -3913,30 +4070,30 @@
                   <a:tcPr anchor="ctr" marL="73152" marR="73152">
                     <a:lnL w="9525" cap="flat" cmpd="sng" algn="ctr">
                       <a:solidFill>
-                        <a:srgbClr val="D1FADC"/>
+                        <a:srgbClr val="FAF1D1"/>
                       </a:solidFill>
                       <a:prstDash val="solid"/>
                     </a:lnL>
                     <a:lnR w="9525" cap="flat" cmpd="sng" algn="ctr">
                       <a:solidFill>
-                        <a:srgbClr val="D1FADC"/>
+                        <a:srgbClr val="FAF1D1"/>
                       </a:solidFill>
                       <a:prstDash val="solid"/>
                     </a:lnR>
                     <a:lnT w="9525" cap="flat" cmpd="sng" algn="ctr">
                       <a:solidFill>
-                        <a:srgbClr val="D1FADC"/>
+                        <a:srgbClr val="FAF1D1"/>
                       </a:solidFill>
                       <a:prstDash val="solid"/>
                     </a:lnT>
                     <a:lnB w="9525" cap="flat" cmpd="sng" algn="ctr">
                       <a:solidFill>
-                        <a:srgbClr val="D1FADC"/>
+                        <a:srgbClr val="FAF1D1"/>
                       </a:solidFill>
                       <a:prstDash val="solid"/>
                     </a:lnB>
                     <a:solidFill>
-                      <a:srgbClr val="D1FADC"/>
+                      <a:srgbClr val="FAF1D1"/>
                     </a:solidFill>
                   </a:tcPr>
                 </a:tc>
@@ -3949,7 +4106,7 @@
                       <a:r>
                         <a:rPr sz="1500" b="0">
                           <a:solidFill>
-                            <a:srgbClr val="2B2B2B"/>
+                            <a:srgbClr val="26231F"/>
                           </a:solidFill>
                         </a:rPr>
                         <a:t>입력하세요</a:t>
@@ -3959,25 +4116,25 @@
                   <a:tcPr anchor="ctr" marL="73152" marR="73152">
                     <a:lnL w="9525" cap="flat" cmpd="sng" algn="ctr">
                       <a:solidFill>
-                        <a:srgbClr val="D1FADC"/>
+                        <a:srgbClr val="FAF1D1"/>
                       </a:solidFill>
                       <a:prstDash val="solid"/>
                     </a:lnL>
                     <a:lnR w="9525" cap="flat" cmpd="sng" algn="ctr">
                       <a:solidFill>
-                        <a:srgbClr val="D1FADC"/>
+                        <a:srgbClr val="FAF1D1"/>
                       </a:solidFill>
                       <a:prstDash val="solid"/>
                     </a:lnR>
                     <a:lnT w="9525" cap="flat" cmpd="sng" algn="ctr">
                       <a:solidFill>
-                        <a:srgbClr val="D1FADC"/>
+                        <a:srgbClr val="FAF1D1"/>
                       </a:solidFill>
                       <a:prstDash val="solid"/>
                     </a:lnT>
                     <a:lnB w="9525" cap="flat" cmpd="sng" algn="ctr">
                       <a:solidFill>
-                        <a:srgbClr val="D1FADC"/>
+                        <a:srgbClr val="FAF1D1"/>
                       </a:solidFill>
                       <a:prstDash val="solid"/>
                     </a:lnB>
@@ -3997,7 +4154,7 @@
                       <a:r>
                         <a:rPr sz="1500" b="1">
                           <a:solidFill>
-                            <a:srgbClr val="115F25"/>
+                            <a:srgbClr val="494127"/>
                           </a:solidFill>
                         </a:rPr>
                         <a:t>별명</a:t>
@@ -4007,30 +4164,30 @@
                   <a:tcPr anchor="ctr" marL="73152" marR="73152">
                     <a:lnL w="9525" cap="flat" cmpd="sng" algn="ctr">
                       <a:solidFill>
-                        <a:srgbClr val="D1FADC"/>
+                        <a:srgbClr val="FAF1D1"/>
                       </a:solidFill>
                       <a:prstDash val="solid"/>
                     </a:lnL>
                     <a:lnR w="9525" cap="flat" cmpd="sng" algn="ctr">
                       <a:solidFill>
-                        <a:srgbClr val="D1FADC"/>
+                        <a:srgbClr val="FAF1D1"/>
                       </a:solidFill>
                       <a:prstDash val="solid"/>
                     </a:lnR>
                     <a:lnT w="9525" cap="flat" cmpd="sng" algn="ctr">
                       <a:solidFill>
-                        <a:srgbClr val="D1FADC"/>
+                        <a:srgbClr val="FAF1D1"/>
                       </a:solidFill>
                       <a:prstDash val="solid"/>
                     </a:lnT>
                     <a:lnB w="9525" cap="flat" cmpd="sng" algn="ctr">
                       <a:solidFill>
-                        <a:srgbClr val="D1FADC"/>
+                        <a:srgbClr val="FAF1D1"/>
                       </a:solidFill>
                       <a:prstDash val="solid"/>
                     </a:lnB>
                     <a:solidFill>
-                      <a:srgbClr val="D1FADC"/>
+                      <a:srgbClr val="FAF1D1"/>
                     </a:solidFill>
                   </a:tcPr>
                 </a:tc>
@@ -4043,7 +4200,7 @@
                       <a:r>
                         <a:rPr sz="1500" b="0">
                           <a:solidFill>
-                            <a:srgbClr val="2B2B2B"/>
+                            <a:srgbClr val="26231F"/>
                           </a:solidFill>
                         </a:rPr>
                         <a:t>입력하세요</a:t>
@@ -4053,30 +4210,30 @@
                   <a:tcPr anchor="ctr" marL="73152" marR="73152">
                     <a:lnL w="9525" cap="flat" cmpd="sng" algn="ctr">
                       <a:solidFill>
-                        <a:srgbClr val="D1FADC"/>
+                        <a:srgbClr val="FAF1D1"/>
                       </a:solidFill>
                       <a:prstDash val="solid"/>
                     </a:lnL>
                     <a:lnR w="9525" cap="flat" cmpd="sng" algn="ctr">
                       <a:solidFill>
-                        <a:srgbClr val="D1FADC"/>
+                        <a:srgbClr val="FAF1D1"/>
                       </a:solidFill>
                       <a:prstDash val="solid"/>
                     </a:lnR>
                     <a:lnT w="9525" cap="flat" cmpd="sng" algn="ctr">
                       <a:solidFill>
-                        <a:srgbClr val="D1FADC"/>
+                        <a:srgbClr val="FAF1D1"/>
                       </a:solidFill>
                       <a:prstDash val="solid"/>
                     </a:lnT>
                     <a:lnB w="9525" cap="flat" cmpd="sng" algn="ctr">
                       <a:solidFill>
-                        <a:srgbClr val="D1FADC"/>
+                        <a:srgbClr val="FAF1D1"/>
                       </a:solidFill>
                       <a:prstDash val="solid"/>
                     </a:lnB>
                     <a:solidFill>
-                      <a:srgbClr val="EEFCF1"/>
+                      <a:srgbClr val="FDF8EA"/>
                     </a:solidFill>
                   </a:tcPr>
                 </a:tc>
@@ -4091,7 +4248,7 @@
                       <a:r>
                         <a:rPr sz="1500" b="1">
                           <a:solidFill>
-                            <a:srgbClr val="115F25"/>
+                            <a:srgbClr val="494127"/>
                           </a:solidFill>
                         </a:rPr>
                         <a:t>부모의 마음</a:t>
@@ -4101,30 +4258,30 @@
                   <a:tcPr anchor="ctr" marL="73152" marR="73152">
                     <a:lnL w="9525" cap="flat" cmpd="sng" algn="ctr">
                       <a:solidFill>
-                        <a:srgbClr val="D1FADC"/>
+                        <a:srgbClr val="FAF1D1"/>
                       </a:solidFill>
                       <a:prstDash val="solid"/>
                     </a:lnL>
                     <a:lnR w="9525" cap="flat" cmpd="sng" algn="ctr">
                       <a:solidFill>
-                        <a:srgbClr val="D1FADC"/>
+                        <a:srgbClr val="FAF1D1"/>
                       </a:solidFill>
                       <a:prstDash val="solid"/>
                     </a:lnR>
                     <a:lnT w="9525" cap="flat" cmpd="sng" algn="ctr">
                       <a:solidFill>
-                        <a:srgbClr val="D1FADC"/>
+                        <a:srgbClr val="FAF1D1"/>
                       </a:solidFill>
                       <a:prstDash val="solid"/>
                     </a:lnT>
                     <a:lnB w="9525" cap="flat" cmpd="sng" algn="ctr">
                       <a:solidFill>
-                        <a:srgbClr val="D1FADC"/>
+                        <a:srgbClr val="FAF1D1"/>
                       </a:solidFill>
                       <a:prstDash val="solid"/>
                     </a:lnB>
                     <a:solidFill>
-                      <a:srgbClr val="D1FADC"/>
+                      <a:srgbClr val="FAF1D1"/>
                     </a:solidFill>
                   </a:tcPr>
                 </a:tc>
@@ -4137,7 +4294,7 @@
                       <a:r>
                         <a:rPr sz="1500" b="0">
                           <a:solidFill>
-                            <a:srgbClr val="2B2B2B"/>
+                            <a:srgbClr val="26231F"/>
                           </a:solidFill>
                         </a:rPr>
                         <a:t>입력하세요</a:t>
@@ -4147,25 +4304,25 @@
                   <a:tcPr anchor="ctr" marL="73152" marR="73152">
                     <a:lnL w="9525" cap="flat" cmpd="sng" algn="ctr">
                       <a:solidFill>
-                        <a:srgbClr val="D1FADC"/>
+                        <a:srgbClr val="FAF1D1"/>
                       </a:solidFill>
                       <a:prstDash val="solid"/>
                     </a:lnL>
                     <a:lnR w="9525" cap="flat" cmpd="sng" algn="ctr">
                       <a:solidFill>
-                        <a:srgbClr val="D1FADC"/>
+                        <a:srgbClr val="FAF1D1"/>
                       </a:solidFill>
                       <a:prstDash val="solid"/>
                     </a:lnR>
                     <a:lnT w="9525" cap="flat" cmpd="sng" algn="ctr">
                       <a:solidFill>
-                        <a:srgbClr val="D1FADC"/>
+                        <a:srgbClr val="FAF1D1"/>
                       </a:solidFill>
                       <a:prstDash val="solid"/>
                     </a:lnT>
                     <a:lnB w="9525" cap="flat" cmpd="sng" algn="ctr">
                       <a:solidFill>
-                        <a:srgbClr val="D1FADC"/>
+                        <a:srgbClr val="FAF1D1"/>
                       </a:solidFill>
                       <a:prstDash val="solid"/>
                     </a:lnB>
@@ -4193,7 +4350,7 @@
     <p:bg>
       <p:bgPr>
         <a:solidFill>
-          <a:srgbClr val="26C54E"/>
+          <a:srgbClr val="FFFFFF"/>
         </a:solidFill>
         <a:effectLst/>
       </p:bgPr>
@@ -4207,95 +4364,160 @@
       <p:grpSpPr/>
       <p:sp>
         <p:nvSpPr>
-          <p:cNvPr id="3" name="장식"/>
+          <p:cNvPr id="3" name="포인트"/>
           <p:cNvSpPr/>
           <p:nvPr/>
         </p:nvSpPr>
         <p:spPr>
           <a:xfrm>
-            <a:off x="274320" y="274320"/>
-            <a:ext cx="11643055" cy="6309360"/>
+            <a:off x="5958687" y="246888"/>
+            <a:ext cx="274320" cy="274320"/>
+          </a:xfrm>
+          <a:prstGeom prst="round2SameRect">
+            <a:avLst/>
+          </a:prstGeom>
+          <a:solidFill>
+            <a:srgbClr val="EAD07B"/>
+          </a:solidFill>
+          <a:ln>
+            <a:noFill/>
+          </a:ln>
+        </p:spPr>
+        <p:txBody>
+          <a:bodyPr rtlCol="0" anchor="ctr"/>
+          <a:lstStyle/>
+          <a:p>
+            <a:pPr algn="ctr"/>
+          </a:p>
+        </p:txBody>
+      </p:sp>
+      <p:sp>
+        <p:nvSpPr>
+          <p:cNvPr id="4" name="장식"/>
+          <p:cNvSpPr/>
+          <p:nvPr/>
+        </p:nvSpPr>
+        <p:spPr>
+          <a:xfrm>
+            <a:off x="5684367" y="1572768"/>
+            <a:ext cx="822960" cy="22860"/>
+          </a:xfrm>
+          <a:prstGeom prst="rect">
+            <a:avLst/>
+          </a:prstGeom>
+          <a:solidFill>
+            <a:srgbClr val="EAD07B"/>
+          </a:solidFill>
+          <a:ln>
+            <a:noFill/>
+          </a:ln>
+        </p:spPr>
+        <p:txBody>
+          <a:bodyPr rtlCol="0" anchor="ctr"/>
+          <a:lstStyle/>
+          <a:p>
+            <a:pPr algn="ctr"/>
+          </a:p>
+        </p:txBody>
+      </p:sp>
+      <p:sp>
+        <p:nvSpPr>
+          <p:cNvPr id="5" name="상단 라벨"/>
+          <p:cNvSpPr txBox="1"/>
+          <p:nvPr/>
+        </p:nvSpPr>
+        <p:spPr>
+          <a:xfrm>
+            <a:off x="640080" y="182880"/>
+            <a:ext cx="3657600" cy="274320"/>
+          </a:xfrm>
+          <a:prstGeom prst="rect">
+            <a:avLst/>
+          </a:prstGeom>
+          <a:noFill/>
+        </p:spPr>
+        <p:txBody>
+          <a:bodyPr wrap="square" lIns="54864" rIns="54864" tIns="27432" bIns="27432" anchor="ctr">
+            <a:noAutofit/>
+          </a:bodyPr>
+          <a:lstStyle/>
+          <a:p>
+            <a:pPr algn="l">
+              <a:lnSpc>
+                <a:spcPct val="115000"/>
+              </a:lnSpc>
+            </a:pPr>
+            <a:r>
+              <a:rPr sz="800" b="1" i="0" spc="250">
+                <a:solidFill>
+                  <a:srgbClr val="8E8780"/>
+                </a:solidFill>
+              </a:rPr>
+              <a:t>FIRST BIRTHDAY</a:t>
+            </a:r>
+          </a:p>
+        </p:txBody>
+      </p:sp>
+      <p:sp>
+        <p:nvSpPr>
+          <p:cNvPr id="2" name="Title 1"/>
+          <p:cNvSpPr>
+            <a:spLocks noGrp="1"/>
+          </p:cNvSpPr>
+          <p:nvPr>
+            <p:ph type="title"/>
+          </p:nvPr>
+        </p:nvSpPr>
+        <p:spPr>
+          <a:xfrm>
+            <a:off x="1371600" y="640080"/>
+            <a:ext cx="9448495" cy="868680"/>
+          </a:xfrm>
+        </p:spPr>
+        <p:txBody>
+          <a:bodyPr wrap="square" lIns="54864" rIns="54864" tIns="27432" bIns="27432" anchor="ctr">
+            <a:noAutofit/>
+          </a:bodyPr>
+          <a:lstStyle/>
+          <a:p>
+            <a:pPr algn="ctr">
+              <a:lnSpc>
+                <a:spcPct val="105000"/>
+              </a:lnSpc>
+            </a:pPr>
+            <a:r>
+              <a:rPr sz="3000" b="1" i="0">
+                <a:solidFill>
+                  <a:srgbClr val="26231F"/>
+                </a:solidFill>
+              </a:rPr>
+              <a:t>돌잡이 이야기</a:t>
+            </a:r>
+          </a:p>
+        </p:txBody>
+      </p:sp>
+      <p:sp>
+        <p:nvSpPr>
+          <p:cNvPr id="6" name="카드 1"/>
+          <p:cNvSpPr/>
+          <p:nvPr/>
+        </p:nvSpPr>
+        <p:spPr>
+          <a:xfrm>
+            <a:off x="640080" y="1783080"/>
+            <a:ext cx="2556433" cy="4572000"/>
           </a:xfrm>
           <a:prstGeom prst="roundRect">
             <a:avLst>
-              <a:gd name="adj" fmla="val 3500"/>
+              <a:gd name="adj" fmla="val 7000"/>
             </a:avLst>
           </a:prstGeom>
           <a:solidFill>
             <a:srgbClr val="FFFFFF"/>
           </a:solidFill>
-          <a:ln>
-            <a:noFill/>
-          </a:ln>
-        </p:spPr>
-        <p:txBody>
-          <a:bodyPr rtlCol="0" anchor="ctr"/>
-          <a:lstStyle/>
-          <a:p>
-            <a:pPr algn="ctr"/>
-          </a:p>
-        </p:txBody>
-      </p:sp>
-      <p:sp>
-        <p:nvSpPr>
-          <p:cNvPr id="2" name="Title 1"/>
-          <p:cNvSpPr>
-            <a:spLocks noGrp="1"/>
-          </p:cNvSpPr>
-          <p:nvPr>
-            <p:ph type="title"/>
-          </p:nvPr>
-        </p:nvSpPr>
-        <p:spPr>
-          <a:xfrm>
-            <a:off x="731520" y="548640"/>
-            <a:ext cx="9448495" cy="868680"/>
-          </a:xfrm>
-        </p:spPr>
-        <p:txBody>
-          <a:bodyPr wrap="square" lIns="54864" rIns="54864" tIns="27432" bIns="27432" anchor="ctr">
-            <a:noAutofit/>
-          </a:bodyPr>
-          <a:lstStyle/>
-          <a:p>
-            <a:pPr algn="l">
-              <a:lnSpc>
-                <a:spcPct val="105000"/>
-              </a:lnSpc>
-            </a:pPr>
-            <a:r>
-              <a:rPr sz="3000" b="1" i="0">
-                <a:solidFill>
-                  <a:srgbClr val="115F25"/>
-                </a:solidFill>
-              </a:rPr>
-              <a:t>돌잡이 이야기</a:t>
-            </a:r>
-          </a:p>
-        </p:txBody>
-      </p:sp>
-      <p:sp>
-        <p:nvSpPr>
-          <p:cNvPr id="4" name="카드 1"/>
-          <p:cNvSpPr/>
-          <p:nvPr/>
-        </p:nvSpPr>
-        <p:spPr>
-          <a:xfrm>
-            <a:off x="731520" y="1600200"/>
-            <a:ext cx="2510713" cy="4617720"/>
-          </a:xfrm>
-          <a:prstGeom prst="roundRect">
-            <a:avLst>
-              <a:gd name="adj" fmla="val 8000"/>
-            </a:avLst>
-          </a:prstGeom>
-          <a:solidFill>
-            <a:srgbClr val="EEFCF1"/>
-          </a:solidFill>
-          <a:ln w="15875">
+          <a:ln w="12700">
             <a:solidFill>
-              <a:srgbClr val="D1FADC"/>
+              <a:srgbClr val="F3E1A5"/>
             </a:solidFill>
           </a:ln>
         </p:spPr>
@@ -4309,57 +4531,14 @@
       </p:sp>
       <p:sp>
         <p:nvSpPr>
-          <p:cNvPr id="5" name="번호 1"/>
-          <p:cNvSpPr/>
-          <p:nvPr/>
-        </p:nvSpPr>
-        <p:spPr>
-          <a:xfrm>
-            <a:off x="914400" y="1783080"/>
-            <a:ext cx="457200" cy="457200"/>
-          </a:xfrm>
-          <a:prstGeom prst="ellipse">
-            <a:avLst/>
-          </a:prstGeom>
-          <a:solidFill>
-            <a:srgbClr val="26C54E"/>
-          </a:solidFill>
-          <a:ln>
-            <a:noFill/>
-          </a:ln>
-        </p:spPr>
-        <p:txBody>
-          <a:bodyPr rtlCol="0" anchor="ctr" wrap="square" lIns="54864" rIns="54864" tIns="27432" bIns="27432">
-            <a:noAutofit/>
-          </a:bodyPr>
-          <a:lstStyle/>
-          <a:p>
-            <a:pPr algn="ctr">
-              <a:lnSpc>
-                <a:spcPct val="100000"/>
-              </a:lnSpc>
-            </a:pPr>
-            <a:r>
-              <a:rPr sz="1600" b="1" i="0">
-                <a:solidFill>
-                  <a:srgbClr val="FFFFFF"/>
-                </a:solidFill>
-              </a:rPr>
-              <a:t>1</a:t>
-            </a:r>
-          </a:p>
-        </p:txBody>
-      </p:sp>
-      <p:sp>
-        <p:nvSpPr>
-          <p:cNvPr id="6" name="TextBox 5"/>
+          <p:cNvPr id="7" name="번호 1"/>
           <p:cNvSpPr txBox="1"/>
           <p:nvPr/>
         </p:nvSpPr>
         <p:spPr>
           <a:xfrm>
-            <a:off x="868680" y="2377440"/>
-            <a:ext cx="2236393" cy="640080"/>
+            <a:off x="731519" y="1920240"/>
+            <a:ext cx="914400" cy="548640"/>
           </a:xfrm>
           <a:prstGeom prst="rect">
             <a:avLst/>
@@ -4378,9 +4557,47 @@
               </a:lnSpc>
             </a:pPr>
             <a:r>
+              <a:rPr sz="2400" b="1" i="0">
+                <a:solidFill>
+                  <a:srgbClr val="EAD07B"/>
+                </a:solidFill>
+              </a:rPr>
+              <a:t>01</a:t>
+            </a:r>
+          </a:p>
+        </p:txBody>
+      </p:sp>
+      <p:sp>
+        <p:nvSpPr>
+          <p:cNvPr id="8" name="TextBox 7"/>
+          <p:cNvSpPr txBox="1"/>
+          <p:nvPr/>
+        </p:nvSpPr>
+        <p:spPr>
+          <a:xfrm>
+            <a:off x="777240" y="2560320"/>
+            <a:ext cx="2282113" cy="640080"/>
+          </a:xfrm>
+          <a:prstGeom prst="rect">
+            <a:avLst/>
+          </a:prstGeom>
+          <a:noFill/>
+        </p:spPr>
+        <p:txBody>
+          <a:bodyPr wrap="square" lIns="54864" rIns="54864" tIns="27432" bIns="27432" anchor="ctr">
+            <a:noAutofit/>
+          </a:bodyPr>
+          <a:lstStyle/>
+          <a:p>
+            <a:pPr algn="l">
+              <a:lnSpc>
+                <a:spcPct val="115000"/>
+              </a:lnSpc>
+            </a:pPr>
+            <a:r>
               <a:rPr sz="1600" b="1" i="0">
                 <a:solidFill>
-                  <a:srgbClr val="115F25"/>
+                  <a:srgbClr val="494127"/>
                 </a:solidFill>
               </a:rPr>
               <a:t>연필 · 공부</a:t>
@@ -4390,14 +4607,14 @@
       </p:sp>
       <p:sp>
         <p:nvSpPr>
-          <p:cNvPr id="7" name="TextBox 6"/>
+          <p:cNvPr id="9" name="TextBox 8"/>
           <p:cNvSpPr txBox="1"/>
           <p:nvPr/>
         </p:nvSpPr>
         <p:spPr>
           <a:xfrm>
-            <a:off x="868680" y="3063240"/>
-            <a:ext cx="2236393" cy="3017520"/>
+            <a:off x="777240" y="3246120"/>
+            <a:ext cx="2282113" cy="2971800"/>
           </a:xfrm>
           <a:prstGeom prst="rect">
             <a:avLst/>
@@ -4418,7 +4635,7 @@
             <a:r>
               <a:rPr sz="1400" b="0" i="0">
                 <a:solidFill>
-                  <a:srgbClr val="2B2B2B"/>
+                  <a:srgbClr val="26231F"/>
                 </a:solidFill>
               </a:rPr>
               <a:t>학문과 총명을 바라는 마음</a:t>
@@ -4428,26 +4645,26 @@
       </p:sp>
       <p:sp>
         <p:nvSpPr>
-          <p:cNvPr id="8" name="카드 2"/>
+          <p:cNvPr id="10" name="카드 2"/>
           <p:cNvSpPr/>
           <p:nvPr/>
         </p:nvSpPr>
         <p:spPr>
           <a:xfrm>
-            <a:off x="3470833" y="1600200"/>
-            <a:ext cx="2510713" cy="4617720"/>
+            <a:off x="3425113" y="1783080"/>
+            <a:ext cx="2556433" cy="4572000"/>
           </a:xfrm>
           <a:prstGeom prst="roundRect">
             <a:avLst>
-              <a:gd name="adj" fmla="val 8000"/>
+              <a:gd name="adj" fmla="val 7000"/>
             </a:avLst>
           </a:prstGeom>
           <a:solidFill>
-            <a:srgbClr val="EEFCF1"/>
+            <a:srgbClr val="FFFFFF"/>
           </a:solidFill>
-          <a:ln w="15875">
+          <a:ln w="12700">
             <a:solidFill>
-              <a:srgbClr val="D1FADC"/>
+              <a:srgbClr val="F3E1A5"/>
             </a:solidFill>
           </a:ln>
         </p:spPr>
@@ -4461,57 +4678,14 @@
       </p:sp>
       <p:sp>
         <p:nvSpPr>
-          <p:cNvPr id="9" name="번호 2"/>
-          <p:cNvSpPr/>
-          <p:nvPr/>
-        </p:nvSpPr>
-        <p:spPr>
-          <a:xfrm>
-            <a:off x="3653713" y="1783080"/>
-            <a:ext cx="457200" cy="457200"/>
-          </a:xfrm>
-          <a:prstGeom prst="ellipse">
-            <a:avLst/>
-          </a:prstGeom>
-          <a:solidFill>
-            <a:srgbClr val="26C54E"/>
-          </a:solidFill>
-          <a:ln>
-            <a:noFill/>
-          </a:ln>
-        </p:spPr>
-        <p:txBody>
-          <a:bodyPr rtlCol="0" anchor="ctr" wrap="square" lIns="54864" rIns="54864" tIns="27432" bIns="27432">
-            <a:noAutofit/>
-          </a:bodyPr>
-          <a:lstStyle/>
-          <a:p>
-            <a:pPr algn="ctr">
-              <a:lnSpc>
-                <a:spcPct val="100000"/>
-              </a:lnSpc>
-            </a:pPr>
-            <a:r>
-              <a:rPr sz="1600" b="1" i="0">
-                <a:solidFill>
-                  <a:srgbClr val="FFFFFF"/>
-                </a:solidFill>
-              </a:rPr>
-              <a:t>2</a:t>
-            </a:r>
-          </a:p>
-        </p:txBody>
-      </p:sp>
-      <p:sp>
-        <p:nvSpPr>
-          <p:cNvPr id="10" name="TextBox 9"/>
+          <p:cNvPr id="11" name="번호 2"/>
           <p:cNvSpPr txBox="1"/>
           <p:nvPr/>
         </p:nvSpPr>
         <p:spPr>
           <a:xfrm>
-            <a:off x="3607993" y="2377440"/>
-            <a:ext cx="2236393" cy="640080"/>
+            <a:off x="3516553" y="1920240"/>
+            <a:ext cx="914400" cy="548640"/>
           </a:xfrm>
           <a:prstGeom prst="rect">
             <a:avLst/>
@@ -4530,9 +4704,47 @@
               </a:lnSpc>
             </a:pPr>
             <a:r>
+              <a:rPr sz="2400" b="1" i="0">
+                <a:solidFill>
+                  <a:srgbClr val="EAD07B"/>
+                </a:solidFill>
+              </a:rPr>
+              <a:t>02</a:t>
+            </a:r>
+          </a:p>
+        </p:txBody>
+      </p:sp>
+      <p:sp>
+        <p:nvSpPr>
+          <p:cNvPr id="12" name="TextBox 11"/>
+          <p:cNvSpPr txBox="1"/>
+          <p:nvPr/>
+        </p:nvSpPr>
+        <p:spPr>
+          <a:xfrm>
+            <a:off x="3562273" y="2560320"/>
+            <a:ext cx="2282113" cy="640080"/>
+          </a:xfrm>
+          <a:prstGeom prst="rect">
+            <a:avLst/>
+          </a:prstGeom>
+          <a:noFill/>
+        </p:spPr>
+        <p:txBody>
+          <a:bodyPr wrap="square" lIns="54864" rIns="54864" tIns="27432" bIns="27432" anchor="ctr">
+            <a:noAutofit/>
+          </a:bodyPr>
+          <a:lstStyle/>
+          <a:p>
+            <a:pPr algn="l">
+              <a:lnSpc>
+                <a:spcPct val="115000"/>
+              </a:lnSpc>
+            </a:pPr>
+            <a:r>
               <a:rPr sz="1600" b="1" i="0">
                 <a:solidFill>
-                  <a:srgbClr val="115F25"/>
+                  <a:srgbClr val="494127"/>
                 </a:solidFill>
               </a:rPr>
               <a:t>실 · 장수</a:t>
@@ -4542,14 +4754,14 @@
       </p:sp>
       <p:sp>
         <p:nvSpPr>
-          <p:cNvPr id="11" name="TextBox 10"/>
+          <p:cNvPr id="13" name="TextBox 12"/>
           <p:cNvSpPr txBox="1"/>
           <p:nvPr/>
         </p:nvSpPr>
         <p:spPr>
           <a:xfrm>
-            <a:off x="3607993" y="3063240"/>
-            <a:ext cx="2236393" cy="3017520"/>
+            <a:off x="3562273" y="3246120"/>
+            <a:ext cx="2282113" cy="2971800"/>
           </a:xfrm>
           <a:prstGeom prst="rect">
             <a:avLst/>
@@ -4570,7 +4782,7 @@
             <a:r>
               <a:rPr sz="1400" b="0" i="0">
                 <a:solidFill>
-                  <a:srgbClr val="2B2B2B"/>
+                  <a:srgbClr val="26231F"/>
                 </a:solidFill>
               </a:rPr>
               <a:t>건강하고 오래 살기를</a:t>
@@ -4580,26 +4792,26 @@
       </p:sp>
       <p:sp>
         <p:nvSpPr>
-          <p:cNvPr id="12" name="카드 3"/>
+          <p:cNvPr id="14" name="카드 3"/>
           <p:cNvSpPr/>
           <p:nvPr/>
         </p:nvSpPr>
         <p:spPr>
           <a:xfrm>
-            <a:off x="6210147" y="1600200"/>
-            <a:ext cx="2510713" cy="4617720"/>
+            <a:off x="6210147" y="1783080"/>
+            <a:ext cx="2556433" cy="4572000"/>
           </a:xfrm>
           <a:prstGeom prst="roundRect">
             <a:avLst>
-              <a:gd name="adj" fmla="val 8000"/>
+              <a:gd name="adj" fmla="val 7000"/>
             </a:avLst>
           </a:prstGeom>
           <a:solidFill>
-            <a:srgbClr val="EEFCF1"/>
+            <a:srgbClr val="FFFFFF"/>
           </a:solidFill>
-          <a:ln w="15875">
+          <a:ln w="12700">
             <a:solidFill>
-              <a:srgbClr val="D1FADC"/>
+              <a:srgbClr val="F3E1A5"/>
             </a:solidFill>
           </a:ln>
         </p:spPr>
@@ -4613,57 +4825,14 @@
       </p:sp>
       <p:sp>
         <p:nvSpPr>
-          <p:cNvPr id="13" name="번호 3"/>
-          <p:cNvSpPr/>
-          <p:nvPr/>
-        </p:nvSpPr>
-        <p:spPr>
-          <a:xfrm>
-            <a:off x="6393027" y="1783080"/>
-            <a:ext cx="457200" cy="457200"/>
-          </a:xfrm>
-          <a:prstGeom prst="ellipse">
-            <a:avLst/>
-          </a:prstGeom>
-          <a:solidFill>
-            <a:srgbClr val="26C54E"/>
-          </a:solidFill>
-          <a:ln>
-            <a:noFill/>
-          </a:ln>
-        </p:spPr>
-        <p:txBody>
-          <a:bodyPr rtlCol="0" anchor="ctr" wrap="square" lIns="54864" rIns="54864" tIns="27432" bIns="27432">
-            <a:noAutofit/>
-          </a:bodyPr>
-          <a:lstStyle/>
-          <a:p>
-            <a:pPr algn="ctr">
-              <a:lnSpc>
-                <a:spcPct val="100000"/>
-              </a:lnSpc>
-            </a:pPr>
-            <a:r>
-              <a:rPr sz="1600" b="1" i="0">
-                <a:solidFill>
-                  <a:srgbClr val="FFFFFF"/>
-                </a:solidFill>
-              </a:rPr>
-              <a:t>3</a:t>
-            </a:r>
-          </a:p>
-        </p:txBody>
-      </p:sp>
-      <p:sp>
-        <p:nvSpPr>
-          <p:cNvPr id="14" name="TextBox 13"/>
+          <p:cNvPr id="15" name="번호 3"/>
           <p:cNvSpPr txBox="1"/>
           <p:nvPr/>
         </p:nvSpPr>
         <p:spPr>
           <a:xfrm>
-            <a:off x="6347307" y="2377440"/>
-            <a:ext cx="2236393" cy="640080"/>
+            <a:off x="6301587" y="1920240"/>
+            <a:ext cx="914400" cy="548640"/>
           </a:xfrm>
           <a:prstGeom prst="rect">
             <a:avLst/>
@@ -4682,9 +4851,47 @@
               </a:lnSpc>
             </a:pPr>
             <a:r>
+              <a:rPr sz="2400" b="1" i="0">
+                <a:solidFill>
+                  <a:srgbClr val="EAD07B"/>
+                </a:solidFill>
+              </a:rPr>
+              <a:t>03</a:t>
+            </a:r>
+          </a:p>
+        </p:txBody>
+      </p:sp>
+      <p:sp>
+        <p:nvSpPr>
+          <p:cNvPr id="16" name="TextBox 15"/>
+          <p:cNvSpPr txBox="1"/>
+          <p:nvPr/>
+        </p:nvSpPr>
+        <p:spPr>
+          <a:xfrm>
+            <a:off x="6347307" y="2560320"/>
+            <a:ext cx="2282113" cy="640080"/>
+          </a:xfrm>
+          <a:prstGeom prst="rect">
+            <a:avLst/>
+          </a:prstGeom>
+          <a:noFill/>
+        </p:spPr>
+        <p:txBody>
+          <a:bodyPr wrap="square" lIns="54864" rIns="54864" tIns="27432" bIns="27432" anchor="ctr">
+            <a:noAutofit/>
+          </a:bodyPr>
+          <a:lstStyle/>
+          <a:p>
+            <a:pPr algn="l">
+              <a:lnSpc>
+                <a:spcPct val="115000"/>
+              </a:lnSpc>
+            </a:pPr>
+            <a:r>
               <a:rPr sz="1600" b="1" i="0">
                 <a:solidFill>
-                  <a:srgbClr val="115F25"/>
+                  <a:srgbClr val="494127"/>
                 </a:solidFill>
               </a:rPr>
               <a:t>돈 · 부</a:t>
@@ -4694,14 +4901,14 @@
       </p:sp>
       <p:sp>
         <p:nvSpPr>
-          <p:cNvPr id="15" name="TextBox 14"/>
+          <p:cNvPr id="17" name="TextBox 16"/>
           <p:cNvSpPr txBox="1"/>
           <p:nvPr/>
         </p:nvSpPr>
         <p:spPr>
           <a:xfrm>
-            <a:off x="6347307" y="3063240"/>
-            <a:ext cx="2236393" cy="3017520"/>
+            <a:off x="6347307" y="3246120"/>
+            <a:ext cx="2282113" cy="2971800"/>
           </a:xfrm>
           <a:prstGeom prst="rect">
             <a:avLst/>
@@ -4722,7 +4929,7 @@
             <a:r>
               <a:rPr sz="1400" b="0" i="0">
                 <a:solidFill>
-                  <a:srgbClr val="2B2B2B"/>
+                  <a:srgbClr val="26231F"/>
                 </a:solidFill>
               </a:rPr>
               <a:t>넉넉한 삶을 바라는 마음</a:t>
@@ -4732,26 +4939,26 @@
       </p:sp>
       <p:sp>
         <p:nvSpPr>
-          <p:cNvPr id="16" name="카드 4"/>
+          <p:cNvPr id="18" name="카드 4"/>
           <p:cNvSpPr/>
           <p:nvPr/>
         </p:nvSpPr>
         <p:spPr>
           <a:xfrm>
-            <a:off x="8949461" y="1600200"/>
-            <a:ext cx="2510713" cy="4617720"/>
+            <a:off x="8995181" y="1783080"/>
+            <a:ext cx="2556433" cy="4572000"/>
           </a:xfrm>
           <a:prstGeom prst="roundRect">
             <a:avLst>
-              <a:gd name="adj" fmla="val 8000"/>
+              <a:gd name="adj" fmla="val 7000"/>
             </a:avLst>
           </a:prstGeom>
           <a:solidFill>
-            <a:srgbClr val="EEFCF1"/>
+            <a:srgbClr val="FFFFFF"/>
           </a:solidFill>
-          <a:ln w="15875">
+          <a:ln w="12700">
             <a:solidFill>
-              <a:srgbClr val="D1FADC"/>
+              <a:srgbClr val="F3E1A5"/>
             </a:solidFill>
           </a:ln>
         </p:spPr>
@@ -4765,57 +4972,14 @@
       </p:sp>
       <p:sp>
         <p:nvSpPr>
-          <p:cNvPr id="17" name="번호 4"/>
-          <p:cNvSpPr/>
-          <p:nvPr/>
-        </p:nvSpPr>
-        <p:spPr>
-          <a:xfrm>
-            <a:off x="9132341" y="1783080"/>
-            <a:ext cx="457200" cy="457200"/>
-          </a:xfrm>
-          <a:prstGeom prst="ellipse">
-            <a:avLst/>
-          </a:prstGeom>
-          <a:solidFill>
-            <a:srgbClr val="26C54E"/>
-          </a:solidFill>
-          <a:ln>
-            <a:noFill/>
-          </a:ln>
-        </p:spPr>
-        <p:txBody>
-          <a:bodyPr rtlCol="0" anchor="ctr" wrap="square" lIns="54864" rIns="54864" tIns="27432" bIns="27432">
-            <a:noAutofit/>
-          </a:bodyPr>
-          <a:lstStyle/>
-          <a:p>
-            <a:pPr algn="ctr">
-              <a:lnSpc>
-                <a:spcPct val="100000"/>
-              </a:lnSpc>
-            </a:pPr>
-            <a:r>
-              <a:rPr sz="1600" b="1" i="0">
-                <a:solidFill>
-                  <a:srgbClr val="FFFFFF"/>
-                </a:solidFill>
-              </a:rPr>
-              <a:t>4</a:t>
-            </a:r>
-          </a:p>
-        </p:txBody>
-      </p:sp>
-      <p:sp>
-        <p:nvSpPr>
-          <p:cNvPr id="18" name="TextBox 17"/>
+          <p:cNvPr id="19" name="번호 4"/>
           <p:cNvSpPr txBox="1"/>
           <p:nvPr/>
         </p:nvSpPr>
         <p:spPr>
           <a:xfrm>
-            <a:off x="9086621" y="2377440"/>
-            <a:ext cx="2236393" cy="640080"/>
+            <a:off x="9086621" y="1920240"/>
+            <a:ext cx="914400" cy="548640"/>
           </a:xfrm>
           <a:prstGeom prst="rect">
             <a:avLst/>
@@ -4834,9 +4998,47 @@
               </a:lnSpc>
             </a:pPr>
             <a:r>
+              <a:rPr sz="2400" b="1" i="0">
+                <a:solidFill>
+                  <a:srgbClr val="EAD07B"/>
+                </a:solidFill>
+              </a:rPr>
+              <a:t>04</a:t>
+            </a:r>
+          </a:p>
+        </p:txBody>
+      </p:sp>
+      <p:sp>
+        <p:nvSpPr>
+          <p:cNvPr id="20" name="TextBox 19"/>
+          <p:cNvSpPr txBox="1"/>
+          <p:nvPr/>
+        </p:nvSpPr>
+        <p:spPr>
+          <a:xfrm>
+            <a:off x="9132341" y="2560320"/>
+            <a:ext cx="2282113" cy="640080"/>
+          </a:xfrm>
+          <a:prstGeom prst="rect">
+            <a:avLst/>
+          </a:prstGeom>
+          <a:noFill/>
+        </p:spPr>
+        <p:txBody>
+          <a:bodyPr wrap="square" lIns="54864" rIns="54864" tIns="27432" bIns="27432" anchor="ctr">
+            <a:noAutofit/>
+          </a:bodyPr>
+          <a:lstStyle/>
+          <a:p>
+            <a:pPr algn="l">
+              <a:lnSpc>
+                <a:spcPct val="115000"/>
+              </a:lnSpc>
+            </a:pPr>
+            <a:r>
               <a:rPr sz="1600" b="1" i="0">
                 <a:solidFill>
-                  <a:srgbClr val="115F25"/>
+                  <a:srgbClr val="494127"/>
                 </a:solidFill>
               </a:rPr>
               <a:t>마이크 · 인기</a:t>
@@ -4846,14 +5048,14 @@
       </p:sp>
       <p:sp>
         <p:nvSpPr>
-          <p:cNvPr id="19" name="TextBox 18"/>
+          <p:cNvPr id="21" name="TextBox 20"/>
           <p:cNvSpPr txBox="1"/>
           <p:nvPr/>
         </p:nvSpPr>
         <p:spPr>
           <a:xfrm>
-            <a:off x="9086621" y="3063240"/>
-            <a:ext cx="2236393" cy="3017520"/>
+            <a:off x="9132341" y="3246120"/>
+            <a:ext cx="2282113" cy="2971800"/>
           </a:xfrm>
           <a:prstGeom prst="rect">
             <a:avLst/>
@@ -4874,7 +5076,7 @@
             <a:r>
               <a:rPr sz="1400" b="0" i="0">
                 <a:solidFill>
-                  <a:srgbClr val="2B2B2B"/>
+                  <a:srgbClr val="26231F"/>
                 </a:solidFill>
               </a:rPr>
               <a:t>사람들에게 사랑받기를</a:t>
@@ -4896,7 +5098,7 @@
     <p:bg>
       <p:bgPr>
         <a:solidFill>
-          <a:srgbClr val="26C54E"/>
+          <a:srgbClr val="FFFFFF"/>
         </a:solidFill>
         <a:effectLst/>
       </p:bgPr>
@@ -4910,22 +5112,20 @@
       <p:grpSpPr/>
       <p:sp>
         <p:nvSpPr>
-          <p:cNvPr id="3" name="장식"/>
+          <p:cNvPr id="3" name="포인트"/>
           <p:cNvSpPr/>
           <p:nvPr/>
         </p:nvSpPr>
         <p:spPr>
           <a:xfrm>
-            <a:off x="274320" y="274320"/>
-            <a:ext cx="11643055" cy="6309360"/>
-          </a:xfrm>
-          <a:prstGeom prst="roundRect">
-            <a:avLst>
-              <a:gd name="adj" fmla="val 3500"/>
-            </a:avLst>
+            <a:off x="5958687" y="246888"/>
+            <a:ext cx="274320" cy="274320"/>
+          </a:xfrm>
+          <a:prstGeom prst="round2SameRect">
+            <a:avLst/>
           </a:prstGeom>
           <a:solidFill>
-            <a:srgbClr val="FFFFFF"/>
+            <a:srgbClr val="EAD07B"/>
           </a:solidFill>
           <a:ln>
             <a:noFill/>
@@ -4941,19 +5141,48 @@
       </p:sp>
       <p:sp>
         <p:nvSpPr>
-          <p:cNvPr id="2" name="Title 1"/>
-          <p:cNvSpPr>
-            <a:spLocks noGrp="1"/>
-          </p:cNvSpPr>
-          <p:nvPr>
-            <p:ph type="title"/>
-          </p:nvPr>
-        </p:nvSpPr>
-        <p:spPr>
-          <a:xfrm>
-            <a:off x="731520" y="548640"/>
-            <a:ext cx="9448495" cy="868680"/>
-          </a:xfrm>
+          <p:cNvPr id="4" name="장식"/>
+          <p:cNvSpPr/>
+          <p:nvPr/>
+        </p:nvSpPr>
+        <p:spPr>
+          <a:xfrm>
+            <a:off x="5684367" y="1572768"/>
+            <a:ext cx="822960" cy="22860"/>
+          </a:xfrm>
+          <a:prstGeom prst="rect">
+            <a:avLst/>
+          </a:prstGeom>
+          <a:solidFill>
+            <a:srgbClr val="EAD07B"/>
+          </a:solidFill>
+          <a:ln>
+            <a:noFill/>
+          </a:ln>
+        </p:spPr>
+        <p:txBody>
+          <a:bodyPr rtlCol="0" anchor="ctr"/>
+          <a:lstStyle/>
+          <a:p>
+            <a:pPr algn="ctr"/>
+          </a:p>
+        </p:txBody>
+      </p:sp>
+      <p:sp>
+        <p:nvSpPr>
+          <p:cNvPr id="5" name="상단 라벨"/>
+          <p:cNvSpPr txBox="1"/>
+          <p:nvPr/>
+        </p:nvSpPr>
+        <p:spPr>
+          <a:xfrm>
+            <a:off x="640080" y="182880"/>
+            <a:ext cx="3657600" cy="274320"/>
+          </a:xfrm>
+          <a:prstGeom prst="rect">
+            <a:avLst/>
+          </a:prstGeom>
+          <a:noFill/>
         </p:spPr>
         <p:txBody>
           <a:bodyPr wrap="square" lIns="54864" rIns="54864" tIns="27432" bIns="27432" anchor="ctr">
@@ -4962,6 +5191,44 @@
           <a:lstStyle/>
           <a:p>
             <a:pPr algn="l">
+              <a:lnSpc>
+                <a:spcPct val="115000"/>
+              </a:lnSpc>
+            </a:pPr>
+            <a:r>
+              <a:rPr sz="800" b="1" i="0" spc="250">
+                <a:solidFill>
+                  <a:srgbClr val="8E8780"/>
+                </a:solidFill>
+              </a:rPr>
+              <a:t>FIRST BIRTHDAY</a:t>
+            </a:r>
+          </a:p>
+        </p:txBody>
+      </p:sp>
+      <p:sp>
+        <p:nvSpPr>
+          <p:cNvPr id="2" name="Title 1"/>
+          <p:cNvSpPr>
+            <a:spLocks noGrp="1"/>
+          </p:cNvSpPr>
+          <p:nvPr>
+            <p:ph type="title"/>
+          </p:nvPr>
+        </p:nvSpPr>
+        <p:spPr>
+          <a:xfrm>
+            <a:off x="1371600" y="640080"/>
+            <a:ext cx="9448495" cy="868680"/>
+          </a:xfrm>
+        </p:spPr>
+        <p:txBody>
+          <a:bodyPr wrap="square" lIns="54864" rIns="54864" tIns="27432" bIns="27432" anchor="ctr">
+            <a:noAutofit/>
+          </a:bodyPr>
+          <a:lstStyle/>
+          <a:p>
+            <a:pPr algn="ctr">
               <a:lnSpc>
                 <a:spcPct val="105000"/>
               </a:lnSpc>
@@ -4969,7 +5236,7 @@
             <a:r>
               <a:rPr sz="3000" b="1" i="0">
                 <a:solidFill>
-                  <a:srgbClr val="115F25"/>
+                  <a:srgbClr val="26231F"/>
                 </a:solidFill>
               </a:rPr>
               <a:t>우리 아기의 선택은?</a:t>
@@ -4979,14 +5246,14 @@
       </p:sp>
       <p:sp>
         <p:nvSpPr>
-          <p:cNvPr id="4" name="사진 자리"/>
+          <p:cNvPr id="6" name="사진 자리"/>
           <p:cNvSpPr/>
           <p:nvPr/>
         </p:nvSpPr>
         <p:spPr>
           <a:xfrm>
-            <a:off x="731520" y="1600200"/>
-            <a:ext cx="4572000" cy="4617720"/>
+            <a:off x="640080" y="1783080"/>
+            <a:ext cx="4572000" cy="4572000"/>
           </a:xfrm>
           <a:prstGeom prst="roundRect">
             <a:avLst>
@@ -4994,12 +5261,10 @@
             </a:avLst>
           </a:prstGeom>
           <a:solidFill>
-            <a:srgbClr val="D1FADC"/>
+            <a:srgbClr val="FAF1D1"/>
           </a:solidFill>
           <a:ln w="19050">
-            <a:solidFill>
-              <a:srgbClr val="26C54E"/>
-            </a:solidFill>
+            <a:noFill/>
             <a:prstDash val="dash"/>
           </a:ln>
         </p:spPr>
@@ -5017,7 +5282,7 @@
             <a:r>
               <a:rPr sz="1400" b="0" i="0">
                 <a:solidFill>
-                  <a:srgbClr val="115F25"/>
+                  <a:srgbClr val="8E8780"/>
                 </a:solidFill>
               </a:rPr>
               <a:t>돌잡이 사진</a:t>
@@ -5027,26 +5292,26 @@
       </p:sp>
       <p:sp>
         <p:nvSpPr>
-          <p:cNvPr id="5" name="선택 칸"/>
+          <p:cNvPr id="7" name="선택 칸"/>
           <p:cNvSpPr/>
           <p:nvPr/>
         </p:nvSpPr>
         <p:spPr>
           <a:xfrm>
-            <a:off x="5669280" y="1600200"/>
-            <a:ext cx="5790895" cy="4617720"/>
+            <a:off x="5577840" y="1783080"/>
+            <a:ext cx="5973775" cy="4572000"/>
           </a:xfrm>
           <a:prstGeom prst="roundRect">
             <a:avLst>
-              <a:gd name="adj" fmla="val 8000"/>
+              <a:gd name="adj" fmla="val 7000"/>
             </a:avLst>
           </a:prstGeom>
           <a:solidFill>
-            <a:srgbClr val="EEFCF1"/>
+            <a:srgbClr val="FFFFFF"/>
           </a:solidFill>
           <a:ln w="12700">
             <a:solidFill>
-              <a:srgbClr val="D1FADC"/>
+              <a:srgbClr val="F3E1A5"/>
             </a:solidFill>
           </a:ln>
         </p:spPr>
@@ -5060,14 +5325,14 @@
       </p:sp>
       <p:sp>
         <p:nvSpPr>
-          <p:cNvPr id="6" name="TextBox 5"/>
+          <p:cNvPr id="8" name="TextBox 7"/>
           <p:cNvSpPr txBox="1"/>
           <p:nvPr/>
         </p:nvSpPr>
         <p:spPr>
           <a:xfrm>
-            <a:off x="5943600" y="1874519"/>
-            <a:ext cx="5242255" cy="4069080"/>
+            <a:off x="5852160" y="2057400"/>
+            <a:ext cx="5425135" cy="4023360"/>
           </a:xfrm>
           <a:prstGeom prst="rect">
             <a:avLst/>
@@ -5088,7 +5353,7 @@
             <a:r>
               <a:rPr sz="1800" b="0" i="0">
                 <a:solidFill>
-                  <a:srgbClr val="2B2B2B"/>
+                  <a:srgbClr val="26231F"/>
                 </a:solidFill>
               </a:rPr>
               <a:t>우리 아기의 선택</a:t>
@@ -5103,7 +5368,7 @@
             <a:r>
               <a:rPr sz="1800" b="0" i="0">
                 <a:solidFill>
-                  <a:srgbClr val="2B2B2B"/>
+                  <a:srgbClr val="26231F"/>
                 </a:solidFill>
               </a:rPr>
               <a:t/>
@@ -5118,7 +5383,7 @@
             <a:r>
               <a:rPr sz="1800" b="0" i="0">
                 <a:solidFill>
-                  <a:srgbClr val="2B2B2B"/>
+                  <a:srgbClr val="26231F"/>
                 </a:solidFill>
               </a:rPr>
               <a:t>무엇을 집었나요?</a:t>
@@ -5133,7 +5398,7 @@
             <a:r>
               <a:rPr sz="1800" b="0" i="0">
                 <a:solidFill>
-                  <a:srgbClr val="2B2B2B"/>
+                  <a:srgbClr val="26231F"/>
                 </a:solidFill>
               </a:rPr>
               <a:t/>
@@ -5148,7 +5413,7 @@
             <a:r>
               <a:rPr sz="1800" b="0" i="0">
                 <a:solidFill>
-                  <a:srgbClr val="2B2B2B"/>
+                  <a:srgbClr val="26231F"/>
                 </a:solidFill>
               </a:rPr>
               <a:t>그때 가족의 반응은?</a:t>
@@ -5170,7 +5435,7 @@
     <p:bg>
       <p:bgPr>
         <a:solidFill>
-          <a:srgbClr val="26C54E"/>
+          <a:srgbClr val="FFFFFF"/>
         </a:solidFill>
         <a:effectLst/>
       </p:bgPr>
@@ -5184,22 +5449,20 @@
       <p:grpSpPr/>
       <p:sp>
         <p:nvSpPr>
-          <p:cNvPr id="3" name="장식"/>
+          <p:cNvPr id="3" name="포인트"/>
           <p:cNvSpPr/>
           <p:nvPr/>
         </p:nvSpPr>
         <p:spPr>
           <a:xfrm>
-            <a:off x="274320" y="274320"/>
-            <a:ext cx="11643055" cy="6309360"/>
-          </a:xfrm>
-          <a:prstGeom prst="roundRect">
-            <a:avLst>
-              <a:gd name="adj" fmla="val 3500"/>
-            </a:avLst>
+            <a:off x="5958687" y="246888"/>
+            <a:ext cx="274320" cy="274320"/>
+          </a:xfrm>
+          <a:prstGeom prst="round2SameRect">
+            <a:avLst/>
           </a:prstGeom>
           <a:solidFill>
-            <a:srgbClr val="FFFFFF"/>
+            <a:srgbClr val="EAD07B"/>
           </a:solidFill>
           <a:ln>
             <a:noFill/>
@@ -5215,19 +5478,48 @@
       </p:sp>
       <p:sp>
         <p:nvSpPr>
-          <p:cNvPr id="2" name="Title 1"/>
-          <p:cNvSpPr>
-            <a:spLocks noGrp="1"/>
-          </p:cNvSpPr>
-          <p:nvPr>
-            <p:ph type="title"/>
-          </p:nvPr>
-        </p:nvSpPr>
-        <p:spPr>
-          <a:xfrm>
-            <a:off x="731520" y="548640"/>
-            <a:ext cx="9448495" cy="868680"/>
-          </a:xfrm>
+          <p:cNvPr id="4" name="장식"/>
+          <p:cNvSpPr/>
+          <p:nvPr/>
+        </p:nvSpPr>
+        <p:spPr>
+          <a:xfrm>
+            <a:off x="5684367" y="1572768"/>
+            <a:ext cx="822960" cy="22860"/>
+          </a:xfrm>
+          <a:prstGeom prst="rect">
+            <a:avLst/>
+          </a:prstGeom>
+          <a:solidFill>
+            <a:srgbClr val="EAD07B"/>
+          </a:solidFill>
+          <a:ln>
+            <a:noFill/>
+          </a:ln>
+        </p:spPr>
+        <p:txBody>
+          <a:bodyPr rtlCol="0" anchor="ctr"/>
+          <a:lstStyle/>
+          <a:p>
+            <a:pPr algn="ctr"/>
+          </a:p>
+        </p:txBody>
+      </p:sp>
+      <p:sp>
+        <p:nvSpPr>
+          <p:cNvPr id="5" name="상단 라벨"/>
+          <p:cNvSpPr txBox="1"/>
+          <p:nvPr/>
+        </p:nvSpPr>
+        <p:spPr>
+          <a:xfrm>
+            <a:off x="640080" y="182880"/>
+            <a:ext cx="3657600" cy="274320"/>
+          </a:xfrm>
+          <a:prstGeom prst="rect">
+            <a:avLst/>
+          </a:prstGeom>
+          <a:noFill/>
         </p:spPr>
         <p:txBody>
           <a:bodyPr wrap="square" lIns="54864" rIns="54864" tIns="27432" bIns="27432" anchor="ctr">
@@ -5236,6 +5528,44 @@
           <a:lstStyle/>
           <a:p>
             <a:pPr algn="l">
+              <a:lnSpc>
+                <a:spcPct val="115000"/>
+              </a:lnSpc>
+            </a:pPr>
+            <a:r>
+              <a:rPr sz="800" b="1" i="0" spc="250">
+                <a:solidFill>
+                  <a:srgbClr val="8E8780"/>
+                </a:solidFill>
+              </a:rPr>
+              <a:t>FIRST BIRTHDAY</a:t>
+            </a:r>
+          </a:p>
+        </p:txBody>
+      </p:sp>
+      <p:sp>
+        <p:nvSpPr>
+          <p:cNvPr id="2" name="Title 1"/>
+          <p:cNvSpPr>
+            <a:spLocks noGrp="1"/>
+          </p:cNvSpPr>
+          <p:nvPr>
+            <p:ph type="title"/>
+          </p:nvPr>
+        </p:nvSpPr>
+        <p:spPr>
+          <a:xfrm>
+            <a:off x="1371600" y="640080"/>
+            <a:ext cx="9448495" cy="868680"/>
+          </a:xfrm>
+        </p:spPr>
+        <p:txBody>
+          <a:bodyPr wrap="square" lIns="54864" rIns="54864" tIns="27432" bIns="27432" anchor="ctr">
+            <a:noAutofit/>
+          </a:bodyPr>
+          <a:lstStyle/>
+          <a:p>
+            <a:pPr algn="ctr">
               <a:lnSpc>
                 <a:spcPct val="105000"/>
               </a:lnSpc>
@@ -5243,7 +5573,7 @@
             <a:r>
               <a:rPr sz="3000" b="1" i="0">
                 <a:solidFill>
-                  <a:srgbClr val="115F25"/>
+                  <a:srgbClr val="26231F"/>
                 </a:solidFill>
               </a:rPr>
               <a:t>사진 모음</a:t>
@@ -5253,14 +5583,14 @@
       </p:sp>
       <p:sp>
         <p:nvSpPr>
-          <p:cNvPr id="4" name="사진 자리"/>
+          <p:cNvPr id="6" name="사진 자리"/>
           <p:cNvSpPr/>
           <p:nvPr/>
         </p:nvSpPr>
         <p:spPr>
           <a:xfrm>
-            <a:off x="731520" y="1600200"/>
-            <a:ext cx="2545003" cy="2217420"/>
+            <a:off x="640080" y="1783080"/>
+            <a:ext cx="2590723" cy="2194560"/>
           </a:xfrm>
           <a:prstGeom prst="roundRect">
             <a:avLst>
@@ -5268,12 +5598,10 @@
             </a:avLst>
           </a:prstGeom>
           <a:solidFill>
-            <a:srgbClr val="D1FADC"/>
+            <a:srgbClr val="FAF1D1"/>
           </a:solidFill>
           <a:ln w="19050">
-            <a:solidFill>
-              <a:srgbClr val="26C54E"/>
-            </a:solidFill>
+            <a:noFill/>
             <a:prstDash val="dash"/>
           </a:ln>
         </p:spPr>
@@ -5291,7 +5619,7 @@
             <a:r>
               <a:rPr sz="1200" b="0" i="0">
                 <a:solidFill>
-                  <a:srgbClr val="115F25"/>
+                  <a:srgbClr val="8E8780"/>
                 </a:solidFill>
               </a:rPr>
               <a:t>사진 1</a:t>
@@ -5301,14 +5629,14 @@
       </p:sp>
       <p:sp>
         <p:nvSpPr>
-          <p:cNvPr id="5" name="사진 자리"/>
+          <p:cNvPr id="7" name="사진 자리"/>
           <p:cNvSpPr/>
           <p:nvPr/>
         </p:nvSpPr>
         <p:spPr>
           <a:xfrm>
-            <a:off x="3459403" y="1600200"/>
-            <a:ext cx="2545003" cy="2217420"/>
+            <a:off x="3413683" y="1783080"/>
+            <a:ext cx="2590723" cy="2194560"/>
           </a:xfrm>
           <a:prstGeom prst="roundRect">
             <a:avLst>
@@ -5316,12 +5644,10 @@
             </a:avLst>
           </a:prstGeom>
           <a:solidFill>
-            <a:srgbClr val="D1FADC"/>
+            <a:srgbClr val="FAF1D1"/>
           </a:solidFill>
           <a:ln w="19050">
-            <a:solidFill>
-              <a:srgbClr val="26C54E"/>
-            </a:solidFill>
+            <a:noFill/>
             <a:prstDash val="dash"/>
           </a:ln>
         </p:spPr>
@@ -5339,7 +5665,7 @@
             <a:r>
               <a:rPr sz="1200" b="0" i="0">
                 <a:solidFill>
-                  <a:srgbClr val="115F25"/>
+                  <a:srgbClr val="8E8780"/>
                 </a:solidFill>
               </a:rPr>
               <a:t>사진 2</a:t>
@@ -5349,14 +5675,14 @@
       </p:sp>
       <p:sp>
         <p:nvSpPr>
-          <p:cNvPr id="6" name="사진 자리"/>
+          <p:cNvPr id="8" name="사진 자리"/>
           <p:cNvSpPr/>
           <p:nvPr/>
         </p:nvSpPr>
         <p:spPr>
           <a:xfrm>
-            <a:off x="6187287" y="1600200"/>
-            <a:ext cx="2545003" cy="2217420"/>
+            <a:off x="6187287" y="1783080"/>
+            <a:ext cx="2590723" cy="2194560"/>
           </a:xfrm>
           <a:prstGeom prst="roundRect">
             <a:avLst>
@@ -5364,12 +5690,10 @@
             </a:avLst>
           </a:prstGeom>
           <a:solidFill>
-            <a:srgbClr val="D1FADC"/>
+            <a:srgbClr val="FAF1D1"/>
           </a:solidFill>
           <a:ln w="19050">
-            <a:solidFill>
-              <a:srgbClr val="26C54E"/>
-            </a:solidFill>
+            <a:noFill/>
             <a:prstDash val="dash"/>
           </a:ln>
         </p:spPr>
@@ -5387,7 +5711,7 @@
             <a:r>
               <a:rPr sz="1200" b="0" i="0">
                 <a:solidFill>
-                  <a:srgbClr val="115F25"/>
+                  <a:srgbClr val="8E8780"/>
                 </a:solidFill>
               </a:rPr>
               <a:t>사진 3</a:t>
@@ -5397,14 +5721,14 @@
       </p:sp>
       <p:sp>
         <p:nvSpPr>
-          <p:cNvPr id="7" name="사진 자리"/>
+          <p:cNvPr id="9" name="사진 자리"/>
           <p:cNvSpPr/>
           <p:nvPr/>
         </p:nvSpPr>
         <p:spPr>
           <a:xfrm>
-            <a:off x="8915171" y="1600200"/>
-            <a:ext cx="2545003" cy="2217420"/>
+            <a:off x="8960891" y="1783080"/>
+            <a:ext cx="2590723" cy="2194560"/>
           </a:xfrm>
           <a:prstGeom prst="roundRect">
             <a:avLst>
@@ -5412,12 +5736,10 @@
             </a:avLst>
           </a:prstGeom>
           <a:solidFill>
-            <a:srgbClr val="D1FADC"/>
+            <a:srgbClr val="FAF1D1"/>
           </a:solidFill>
           <a:ln w="19050">
-            <a:solidFill>
-              <a:srgbClr val="26C54E"/>
-            </a:solidFill>
+            <a:noFill/>
             <a:prstDash val="dash"/>
           </a:ln>
         </p:spPr>
@@ -5435,7 +5757,7 @@
             <a:r>
               <a:rPr sz="1200" b="0" i="0">
                 <a:solidFill>
-                  <a:srgbClr val="115F25"/>
+                  <a:srgbClr val="8E8780"/>
                 </a:solidFill>
               </a:rPr>
               <a:t>사진 4</a:t>
@@ -5445,14 +5767,14 @@
       </p:sp>
       <p:sp>
         <p:nvSpPr>
-          <p:cNvPr id="8" name="사진 자리"/>
+          <p:cNvPr id="10" name="사진 자리"/>
           <p:cNvSpPr/>
           <p:nvPr/>
         </p:nvSpPr>
         <p:spPr>
           <a:xfrm>
-            <a:off x="731520" y="4000500"/>
-            <a:ext cx="2545003" cy="2217420"/>
+            <a:off x="640080" y="4160520"/>
+            <a:ext cx="2590723" cy="2194560"/>
           </a:xfrm>
           <a:prstGeom prst="roundRect">
             <a:avLst>
@@ -5460,12 +5782,10 @@
             </a:avLst>
           </a:prstGeom>
           <a:solidFill>
-            <a:srgbClr val="D1FADC"/>
+            <a:srgbClr val="FAF1D1"/>
           </a:solidFill>
           <a:ln w="19050">
-            <a:solidFill>
-              <a:srgbClr val="26C54E"/>
-            </a:solidFill>
+            <a:noFill/>
             <a:prstDash val="dash"/>
           </a:ln>
         </p:spPr>
@@ -5483,7 +5803,7 @@
             <a:r>
               <a:rPr sz="1200" b="0" i="0">
                 <a:solidFill>
-                  <a:srgbClr val="115F25"/>
+                  <a:srgbClr val="8E8780"/>
                 </a:solidFill>
               </a:rPr>
               <a:t>사진 5</a:t>
@@ -5493,14 +5813,14 @@
       </p:sp>
       <p:sp>
         <p:nvSpPr>
-          <p:cNvPr id="9" name="사진 자리"/>
+          <p:cNvPr id="11" name="사진 자리"/>
           <p:cNvSpPr/>
           <p:nvPr/>
         </p:nvSpPr>
         <p:spPr>
           <a:xfrm>
-            <a:off x="3459403" y="4000500"/>
-            <a:ext cx="2545003" cy="2217420"/>
+            <a:off x="3413683" y="4160520"/>
+            <a:ext cx="2590723" cy="2194560"/>
           </a:xfrm>
           <a:prstGeom prst="roundRect">
             <a:avLst>
@@ -5508,12 +5828,10 @@
             </a:avLst>
           </a:prstGeom>
           <a:solidFill>
-            <a:srgbClr val="D1FADC"/>
+            <a:srgbClr val="FAF1D1"/>
           </a:solidFill>
           <a:ln w="19050">
-            <a:solidFill>
-              <a:srgbClr val="26C54E"/>
-            </a:solidFill>
+            <a:noFill/>
             <a:prstDash val="dash"/>
           </a:ln>
         </p:spPr>
@@ -5531,7 +5849,7 @@
             <a:r>
               <a:rPr sz="1200" b="0" i="0">
                 <a:solidFill>
-                  <a:srgbClr val="115F25"/>
+                  <a:srgbClr val="8E8780"/>
                 </a:solidFill>
               </a:rPr>
               <a:t>사진 6</a:t>
@@ -5541,14 +5859,14 @@
       </p:sp>
       <p:sp>
         <p:nvSpPr>
-          <p:cNvPr id="10" name="사진 자리"/>
+          <p:cNvPr id="12" name="사진 자리"/>
           <p:cNvSpPr/>
           <p:nvPr/>
         </p:nvSpPr>
         <p:spPr>
           <a:xfrm>
-            <a:off x="6187287" y="4000500"/>
-            <a:ext cx="2545003" cy="2217420"/>
+            <a:off x="6187287" y="4160520"/>
+            <a:ext cx="2590723" cy="2194560"/>
           </a:xfrm>
           <a:prstGeom prst="roundRect">
             <a:avLst>
@@ -5556,12 +5874,10 @@
             </a:avLst>
           </a:prstGeom>
           <a:solidFill>
-            <a:srgbClr val="D1FADC"/>
+            <a:srgbClr val="FAF1D1"/>
           </a:solidFill>
           <a:ln w="19050">
-            <a:solidFill>
-              <a:srgbClr val="26C54E"/>
-            </a:solidFill>
+            <a:noFill/>
             <a:prstDash val="dash"/>
           </a:ln>
         </p:spPr>
@@ -5579,7 +5895,7 @@
             <a:r>
               <a:rPr sz="1200" b="0" i="0">
                 <a:solidFill>
-                  <a:srgbClr val="115F25"/>
+                  <a:srgbClr val="8E8780"/>
                 </a:solidFill>
               </a:rPr>
               <a:t>사진 7</a:t>
@@ -5589,14 +5905,14 @@
       </p:sp>
       <p:sp>
         <p:nvSpPr>
-          <p:cNvPr id="11" name="사진 자리"/>
+          <p:cNvPr id="13" name="사진 자리"/>
           <p:cNvSpPr/>
           <p:nvPr/>
         </p:nvSpPr>
         <p:spPr>
           <a:xfrm>
-            <a:off x="8915171" y="4000500"/>
-            <a:ext cx="2545003" cy="2217420"/>
+            <a:off x="8960891" y="4160520"/>
+            <a:ext cx="2590723" cy="2194560"/>
           </a:xfrm>
           <a:prstGeom prst="roundRect">
             <a:avLst>
@@ -5604,12 +5920,10 @@
             </a:avLst>
           </a:prstGeom>
           <a:solidFill>
-            <a:srgbClr val="D1FADC"/>
+            <a:srgbClr val="FAF1D1"/>
           </a:solidFill>
           <a:ln w="19050">
-            <a:solidFill>
-              <a:srgbClr val="26C54E"/>
-            </a:solidFill>
+            <a:noFill/>
             <a:prstDash val="dash"/>
           </a:ln>
         </p:spPr>
@@ -5627,7 +5941,7 @@
             <a:r>
               <a:rPr sz="1200" b="0" i="0">
                 <a:solidFill>
-                  <a:srgbClr val="115F25"/>
+                  <a:srgbClr val="8E8780"/>
                 </a:solidFill>
               </a:rPr>
               <a:t>사진 8</a:t>
@@ -5646,6 +5960,14 @@
 <file path=ppt/slides/slide6.xml><?xml version="1.0" encoding="utf-8"?>
 <p:sld xmlns:a="http://schemas.openxmlformats.org/drawingml/2006/main" xmlns:p="http://schemas.openxmlformats.org/presentationml/2006/main" xmlns:r="http://schemas.openxmlformats.org/officeDocument/2006/relationships">
   <p:cSld>
+    <p:bg>
+      <p:bgPr>
+        <a:solidFill>
+          <a:srgbClr val="FDF8EA"/>
+        </a:solidFill>
+        <a:effectLst/>
+      </p:bgPr>
+    </p:bg>
     <p:spTree>
       <p:nvGrpSpPr>
         <p:cNvPr id="1" name=""/>
@@ -5653,30 +5975,116 @@
         <p:nvPr/>
       </p:nvGrpSpPr>
       <p:grpSpPr/>
-      <p:pic>
-        <p:nvPicPr>
-          <p:cNvPr id="3" name="표지 그림" descr="birthday-17.jpg"/>
-          <p:cNvPicPr>
-            <a:picLocks noChangeAspect="1"/>
-          </p:cNvPicPr>
+      <p:sp>
+        <p:nvSpPr>
+          <p:cNvPr id="3" name="사진 자리"/>
+          <p:cNvSpPr/>
           <p:nvPr/>
-        </p:nvPicPr>
-        <p:blipFill>
-          <a:blip r:embed="rId2"/>
-          <a:stretch>
-            <a:fillRect/>
-          </a:stretch>
-        </p:blipFill>
+        </p:nvSpPr>
         <p:spPr>
           <a:xfrm>
             <a:off x="0" y="0"/>
-            <a:ext cx="12191695" cy="6858000"/>
+            <a:ext cx="4389010" cy="6858000"/>
           </a:xfrm>
           <a:prstGeom prst="rect">
             <a:avLst/>
           </a:prstGeom>
-        </p:spPr>
-      </p:pic>
+          <a:solidFill>
+            <a:srgbClr val="F3E1A5"/>
+          </a:solidFill>
+          <a:ln>
+            <a:noFill/>
+          </a:ln>
+        </p:spPr>
+        <p:txBody>
+          <a:bodyPr rtlCol="0" anchor="ctr" wrap="square" lIns="54864" rIns="54864" tIns="27432" bIns="27432">
+            <a:noAutofit/>
+          </a:bodyPr>
+          <a:lstStyle/>
+          <a:p>
+            <a:pPr algn="ctr">
+              <a:lnSpc>
+                <a:spcPct val="100000"/>
+              </a:lnSpc>
+            </a:pPr>
+            <a:r>
+              <a:rPr sz="1400" b="0" i="0">
+                <a:solidFill>
+                  <a:srgbClr val="494127"/>
+                </a:solidFill>
+              </a:rPr>
+              <a:t>사진을 넣어 주세요</a:t>
+            </a:r>
+          </a:p>
+        </p:txBody>
+      </p:sp>
+      <p:sp>
+        <p:nvSpPr>
+          <p:cNvPr id="4" name="장식"/>
+          <p:cNvSpPr/>
+          <p:nvPr/>
+        </p:nvSpPr>
+        <p:spPr>
+          <a:xfrm>
+            <a:off x="365750" y="365760"/>
+            <a:ext cx="3657508" cy="6126480"/>
+          </a:xfrm>
+          <a:prstGeom prst="rect">
+            <a:avLst/>
+          </a:prstGeom>
+          <a:noFill/>
+          <a:ln w="9525">
+            <a:solidFill>
+              <a:srgbClr val="26231F"/>
+            </a:solidFill>
+          </a:ln>
+        </p:spPr>
+        <p:txBody>
+          <a:bodyPr rtlCol="0" anchor="ctr"/>
+          <a:lstStyle/>
+          <a:p>
+            <a:pPr algn="ctr"/>
+          </a:p>
+        </p:txBody>
+      </p:sp>
+      <p:sp>
+        <p:nvSpPr>
+          <p:cNvPr id="5" name="라벨"/>
+          <p:cNvSpPr txBox="1"/>
+          <p:nvPr/>
+        </p:nvSpPr>
+        <p:spPr>
+          <a:xfrm>
+            <a:off x="6827349" y="2148840"/>
+            <a:ext cx="4632844" cy="274320"/>
+          </a:xfrm>
+          <a:prstGeom prst="rect">
+            <a:avLst/>
+          </a:prstGeom>
+          <a:noFill/>
+        </p:spPr>
+        <p:txBody>
+          <a:bodyPr wrap="square" lIns="54864" rIns="54864" tIns="27432" bIns="27432" anchor="t">
+            <a:noAutofit/>
+          </a:bodyPr>
+          <a:lstStyle/>
+          <a:p>
+            <a:pPr algn="l">
+              <a:lnSpc>
+                <a:spcPct val="115000"/>
+              </a:lnSpc>
+            </a:pPr>
+            <a:r>
+              <a:rPr sz="1000" b="1" i="0" spc="250">
+                <a:solidFill>
+                  <a:srgbClr val="26231F"/>
+                </a:solidFill>
+              </a:rPr>
+              <a:t>FIRST BIRTHDAY</a:t>
+            </a:r>
+          </a:p>
+        </p:txBody>
+      </p:sp>
       <p:sp>
         <p:nvSpPr>
           <p:cNvPr id="2" name="Title 1"/>
@@ -5689,8 +6097,8 @@
         </p:nvSpPr>
         <p:spPr>
           <a:xfrm>
-            <a:off x="853418" y="2057400"/>
-            <a:ext cx="6095847" cy="1554480"/>
+            <a:off x="6827349" y="2606040"/>
+            <a:ext cx="4632844" cy="1188720"/>
           </a:xfrm>
         </p:spPr>
         <p:txBody>
@@ -5707,7 +6115,7 @@
             <a:r>
               <a:rPr sz="3400" b="1" i="0">
                 <a:solidFill>
-                  <a:srgbClr val="115F25"/>
+                  <a:srgbClr val="26231F"/>
                 </a:solidFill>
               </a:rPr>
               <a:t>와 주셔서 고맙습니다</a:t>
@@ -5717,14 +6125,14 @@
       </p:sp>
       <p:sp>
         <p:nvSpPr>
-          <p:cNvPr id="4" name="한 줄 문구"/>
+          <p:cNvPr id="6" name="한 줄 문구"/>
           <p:cNvSpPr txBox="1"/>
           <p:nvPr/>
         </p:nvSpPr>
         <p:spPr>
           <a:xfrm>
-            <a:off x="853418" y="3749039"/>
-            <a:ext cx="6095847" cy="822960"/>
+            <a:off x="6827349" y="3886200"/>
+            <a:ext cx="4632844" cy="822960"/>
           </a:xfrm>
           <a:prstGeom prst="rect">
             <a:avLst/>
@@ -5743,9 +6151,9 @@
               </a:lnSpc>
             </a:pPr>
             <a:r>
-              <a:rPr sz="1700" b="0" i="1">
-                <a:solidFill>
-                  <a:srgbClr val="115F25"/>
+              <a:rPr sz="1700" b="0" i="0">
+                <a:solidFill>
+                  <a:srgbClr val="26231F"/>
                 </a:solidFill>
               </a:rPr>
               <a:t>아이가 한 살이 되었습니다</a:t>
@@ -5755,14 +6163,14 @@
       </p:sp>
       <p:sp>
         <p:nvSpPr>
-          <p:cNvPr id="5" name="안내 문구"/>
+          <p:cNvPr id="7" name="안내 문구"/>
           <p:cNvSpPr txBox="1"/>
           <p:nvPr/>
         </p:nvSpPr>
         <p:spPr>
           <a:xfrm>
-            <a:off x="853418" y="4617720"/>
-            <a:ext cx="6095847" cy="914400"/>
+            <a:off x="6827349" y="4754880"/>
+            <a:ext cx="4632844" cy="914400"/>
           </a:xfrm>
           <a:prstGeom prst="rect">
             <a:avLst/>
@@ -5783,7 +6191,7 @@
             <a:r>
               <a:rPr sz="1400" b="0" i="0">
                 <a:solidFill>
-                  <a:srgbClr val="666666"/>
+                  <a:srgbClr val="26231F"/>
                 </a:solidFill>
               </a:rPr>
               <a:t>아기 이름 · 부모 이름</a:t>
@@ -5810,34 +6218,34 @@
         <a:sysClr val="window" lastClr="FFFFFF"/>
       </a:lt1>
       <a:dk2>
-        <a:srgbClr val="115F25"/>
+        <a:srgbClr val="494127"/>
       </a:dk2>
       <a:lt2>
-        <a:srgbClr val="EEFCF1"/>
+        <a:srgbClr val="FDF8EA"/>
       </a:lt2>
       <a:accent1>
-        <a:srgbClr val="26C54E"/>
+        <a:srgbClr val="EAD07B"/>
       </a:accent1>
       <a:accent2>
-        <a:srgbClr val="209DB6"/>
+        <a:srgbClr val="DCEF9F"/>
       </a:accent2>
       <a:accent3>
-        <a:srgbClr val="115F25"/>
+        <a:srgbClr val="494127"/>
       </a:accent3>
       <a:accent4>
-        <a:srgbClr val="D1FADC"/>
+        <a:srgbClr val="FAF1D1"/>
       </a:accent4>
       <a:accent5>
-        <a:srgbClr val="23B182"/>
+        <a:srgbClr val="E3E08D"/>
       </a:accent5>
       <a:accent6>
-        <a:srgbClr val="709F7C"/>
+        <a:srgbClr val="928D7D"/>
       </a:accent6>
       <a:hlink>
-        <a:srgbClr val="26C54E"/>
+        <a:srgbClr val="EAD07B"/>
       </a:hlink>
       <a:folHlink>
-        <a:srgbClr val="115F25"/>
+        <a:srgbClr val="494127"/>
       </a:folHlink>
     </a:clrScheme>
     <a:fontScheme name="Office">
